--- a/ppt/JaipalKasireddy_X25156381_smart-mining-safety.pptx
+++ b/ppt/JaipalKasireddy_X25156381_smart-mining-safety.pptx
@@ -1163,7 +1163,7 @@
           <a:bodyPr wrap="square" rtlCol="0" anchor="t"/>
           <a:lstStyle/>
           <a:p>
-            <a:pPr algn="l" indent="0" marL="0">
+            <a:pPr indent="0" marL="0">
               <a:buNone/>
             </a:pPr>
             <a:r>
@@ -1314,7 +1314,7 @@
               <a:buNone/>
             </a:pPr>
             <a:r>
-              <a:rPr lang="en-US" sz="1400" b="1" dirty="0">
+              <a:rPr lang="en-US" sz="1350" b="1" dirty="0">
                 <a:solidFill>
                   <a:srgbClr val="D9A62E"/>
                 </a:solidFill>
@@ -1324,7 +1324,7 @@
               </a:rPr>
               <a:t>Methane &gt; 1,000 ppm</a:t>
             </a:r>
-            <a:endParaRPr lang="en-US" sz="1400" dirty="0"/>
+            <a:endParaRPr lang="en-US" sz="1350" dirty="0"/>
           </a:p>
         </p:txBody>
       </p:sp>
@@ -1380,7 +1380,7 @@
               <a:buNone/>
             </a:pPr>
             <a:r>
-              <a:rPr lang="en-US" sz="1400" b="1" dirty="0">
+              <a:rPr lang="en-US" sz="1350" b="1" dirty="0">
                 <a:solidFill>
                   <a:srgbClr val="D9A62E"/>
                 </a:solidFill>
@@ -1390,7 +1390,7 @@
               </a:rPr>
               <a:t>CO &gt; 50 ppm</a:t>
             </a:r>
-            <a:endParaRPr lang="en-US" sz="1400" dirty="0"/>
+            <a:endParaRPr lang="en-US" sz="1350" dirty="0"/>
           </a:p>
         </p:txBody>
       </p:sp>
@@ -1446,7 +1446,7 @@
               <a:buNone/>
             </a:pPr>
             <a:r>
-              <a:rPr lang="en-US" sz="1400" b="1" dirty="0">
+              <a:rPr lang="en-US" sz="1350" b="1" dirty="0">
                 <a:solidFill>
                   <a:srgbClr val="D9A62E"/>
                 </a:solidFill>
@@ -1456,7 +1456,7 @@
               </a:rPr>
               <a:t>Vibration &gt; 25 mm/s</a:t>
             </a:r>
-            <a:endParaRPr lang="en-US" sz="1400" dirty="0"/>
+            <a:endParaRPr lang="en-US" sz="1350" dirty="0"/>
           </a:p>
         </p:txBody>
       </p:sp>
@@ -1578,12 +1578,12 @@
         </p:nvSpPr>
         <p:spPr>
           <a:xfrm>
-            <a:off x="640080" y="2468880"/>
-            <a:ext cx="1572768" cy="1371600"/>
+            <a:off x="640080" y="1554480"/>
+            <a:ext cx="3200400" cy="3383280"/>
           </a:xfrm>
           <a:prstGeom prst="roundRect">
             <a:avLst>
-              <a:gd name="adj" fmla="val 6667"/>
+              <a:gd name="adj" fmla="val 2857"/>
             </a:avLst>
           </a:prstGeom>
           <a:solidFill>
@@ -1599,146 +1599,63 @@
       </p:sp>
       <p:sp>
         <p:nvSpPr>
-          <p:cNvPr id="4" name="Shape 2"/>
-          <p:cNvSpPr/>
-          <p:nvPr/>
-        </p:nvSpPr>
-        <p:spPr>
-          <a:xfrm>
-            <a:off x="1325880" y="2670048"/>
-            <a:ext cx="201168" cy="201168"/>
-          </a:xfrm>
-          <a:prstGeom prst="ellipse">
-            <a:avLst/>
-          </a:prstGeom>
-          <a:solidFill>
-            <a:srgbClr val="9A8248"/>
-          </a:solidFill>
-          <a:ln/>
-        </p:spPr>
-      </p:sp>
-      <p:sp>
-        <p:nvSpPr>
-          <p:cNvPr id="5" name="Text 3"/>
-          <p:cNvSpPr/>
-          <p:nvPr/>
-        </p:nvSpPr>
-        <p:spPr>
-          <a:xfrm>
-            <a:off x="594360" y="2926080"/>
-            <a:ext cx="1664208" cy="411480"/>
-          </a:xfrm>
-          <a:prstGeom prst="rect">
-            <a:avLst/>
-          </a:prstGeom>
-          <a:noFill/>
-          <a:ln/>
-        </p:spPr>
-        <p:txBody>
-          <a:bodyPr wrap="square" lIns="0" tIns="0" rIns="0" bIns="0" rtlCol="0" anchor="ctr"/>
+          <p:cNvPr id="4" name="Text 2"/>
+          <p:cNvSpPr/>
+          <p:nvPr/>
+        </p:nvSpPr>
+        <p:spPr>
+          <a:xfrm>
+            <a:off x="640080" y="1691640"/>
+            <a:ext cx="3200400" cy="365760"/>
+          </a:xfrm>
+          <a:prstGeom prst="rect">
+            <a:avLst/>
+          </a:prstGeom>
+          <a:noFill/>
+          <a:ln/>
+        </p:spPr>
+        <p:txBody>
+          <a:bodyPr wrap="square" rtlCol="0" anchor="ctr"/>
           <a:lstStyle/>
           <a:p>
             <a:pPr algn="ctr" indent="0" marL="0">
               <a:buNone/>
             </a:pPr>
             <a:r>
-              <a:rPr lang="en-US" sz="1450" b="1" dirty="0">
-                <a:solidFill>
-                  <a:srgbClr val="231D13"/>
+              <a:rPr lang="en-US" sz="1200" b="1" spc="300" kern="0" dirty="0">
+                <a:solidFill>
+                  <a:srgbClr val="9A8248"/>
                 </a:solidFill>
                 <a:latin typeface="Calibri" pitchFamily="34" charset="0"/>
                 <a:ea typeface="Calibri" pitchFamily="34" charset="-122"/>
                 <a:cs typeface="Calibri" pitchFamily="34" charset="-120"/>
               </a:rPr>
-              <a:t>Shaft sensors</a:t>
-            </a:r>
-            <a:endParaRPr lang="en-US" sz="1450" dirty="0"/>
-          </a:p>
-        </p:txBody>
-      </p:sp>
-      <p:sp>
-        <p:nvSpPr>
-          <p:cNvPr id="6" name="Text 4"/>
-          <p:cNvSpPr/>
-          <p:nvPr/>
-        </p:nvSpPr>
-        <p:spPr>
-          <a:xfrm>
-            <a:off x="621792" y="3310128"/>
-            <a:ext cx="1609344" cy="457200"/>
-          </a:xfrm>
-          <a:prstGeom prst="rect">
-            <a:avLst/>
-          </a:prstGeom>
-          <a:noFill/>
-          <a:ln/>
-        </p:spPr>
-        <p:txBody>
-          <a:bodyPr wrap="square" lIns="0" tIns="0" rIns="0" bIns="0" rtlCol="0" anchor="t"/>
-          <a:lstStyle/>
-          <a:p>
-            <a:pPr algn="ctr" indent="0" marL="0">
-              <a:buNone/>
-            </a:pPr>
-            <a:r>
-              <a:rPr lang="en-US" sz="1050" dirty="0">
-                <a:solidFill>
-                  <a:srgbClr val="6E6248"/>
-                </a:solidFill>
-                <a:latin typeface="Calibri" pitchFamily="34" charset="0"/>
-                <a:ea typeface="Calibri" pitchFamily="34" charset="-122"/>
-                <a:cs typeface="Calibri" pitchFamily="34" charset="-120"/>
-              </a:rPr>
-              <a:t>10 · 2 shafts · 5 hazards</a:t>
-            </a:r>
-            <a:endParaRPr lang="en-US" sz="1050" dirty="0"/>
-          </a:p>
-        </p:txBody>
-      </p:sp>
-      <p:sp>
-        <p:nvSpPr>
-          <p:cNvPr id="7" name="Shape 5"/>
-          <p:cNvSpPr/>
-          <p:nvPr/>
-        </p:nvSpPr>
-        <p:spPr>
-          <a:xfrm>
-            <a:off x="2231136" y="3154680"/>
-            <a:ext cx="258409" cy="0"/>
-          </a:xfrm>
-          <a:prstGeom prst="line">
-            <a:avLst/>
-          </a:prstGeom>
-          <a:noFill/>
-          <a:ln w="25400">
-            <a:solidFill>
-              <a:srgbClr val="9A8248"/>
-            </a:solidFill>
-            <a:prstDash val="solid"/>
-            <a:tailEnd type="triangle"/>
-          </a:ln>
-        </p:spPr>
-      </p:sp>
-      <p:sp>
-        <p:nvSpPr>
-          <p:cNvPr id="8" name="Shape 6"/>
-          <p:cNvSpPr/>
-          <p:nvPr/>
-        </p:nvSpPr>
-        <p:spPr>
-          <a:xfrm>
-            <a:off x="2507833" y="2468880"/>
-            <a:ext cx="1572768" cy="1371600"/>
+              <a:t>EDGE</a:t>
+            </a:r>
+            <a:endParaRPr lang="en-US" sz="1200" dirty="0"/>
+          </a:p>
+        </p:txBody>
+      </p:sp>
+      <p:sp>
+        <p:nvSpPr>
+          <p:cNvPr id="5" name="Shape 3"/>
+          <p:cNvSpPr/>
+          <p:nvPr/>
+        </p:nvSpPr>
+        <p:spPr>
+          <a:xfrm>
+            <a:off x="914400" y="2286000"/>
+            <a:ext cx="2651760" cy="1005840"/>
           </a:xfrm>
           <a:prstGeom prst="roundRect">
             <a:avLst>
-              <a:gd name="adj" fmla="val 6667"/>
+              <a:gd name="adj" fmla="val 7273"/>
             </a:avLst>
           </a:prstGeom>
           <a:solidFill>
-            <a:srgbClr val="F4EFE4"/>
+            <a:srgbClr val="FFFFFF"/>
           </a:solidFill>
-          <a:ln w="19050">
+          <a:ln w="15240">
             <a:solidFill>
               <a:srgbClr val="9A8248"/>
             </a:solidFill>
@@ -1748,34 +1665,14 @@
       </p:sp>
       <p:sp>
         <p:nvSpPr>
-          <p:cNvPr id="9" name="Shape 7"/>
-          <p:cNvSpPr/>
-          <p:nvPr/>
-        </p:nvSpPr>
-        <p:spPr>
-          <a:xfrm>
-            <a:off x="3193633" y="2670048"/>
-            <a:ext cx="201168" cy="201168"/>
-          </a:xfrm>
-          <a:prstGeom prst="ellipse">
-            <a:avLst/>
-          </a:prstGeom>
-          <a:solidFill>
-            <a:srgbClr val="9A8248"/>
-          </a:solidFill>
-          <a:ln/>
-        </p:spPr>
-      </p:sp>
-      <p:sp>
-        <p:nvSpPr>
-          <p:cNvPr id="10" name="Text 8"/>
-          <p:cNvSpPr/>
-          <p:nvPr/>
-        </p:nvSpPr>
-        <p:spPr>
-          <a:xfrm>
-            <a:off x="2462113" y="2926080"/>
-            <a:ext cx="1664208" cy="411480"/>
+          <p:cNvPr id="6" name="Text 4"/>
+          <p:cNvSpPr/>
+          <p:nvPr/>
+        </p:nvSpPr>
+        <p:spPr>
+          <a:xfrm>
+            <a:off x="914400" y="2432304"/>
+            <a:ext cx="2651760" cy="365760"/>
           </a:xfrm>
           <a:prstGeom prst="rect">
             <a:avLst/>
@@ -1791,7 +1688,7 @@
               <a:buNone/>
             </a:pPr>
             <a:r>
-              <a:rPr lang="en-US" sz="1450" b="1" dirty="0">
+              <a:rPr lang="en-US" sz="1400" b="1" dirty="0">
                 <a:solidFill>
                   <a:srgbClr val="231D13"/>
                 </a:solidFill>
@@ -1799,38 +1696,38 @@
                 <a:ea typeface="Calibri" pitchFamily="34" charset="-122"/>
                 <a:cs typeface="Calibri" pitchFamily="34" charset="-120"/>
               </a:rPr>
-              <a:t>Fog node</a:t>
-            </a:r>
-            <a:endParaRPr lang="en-US" sz="1450" dirty="0"/>
-          </a:p>
-        </p:txBody>
-      </p:sp>
-      <p:sp>
-        <p:nvSpPr>
-          <p:cNvPr id="11" name="Text 9"/>
-          <p:cNvSpPr/>
-          <p:nvPr/>
-        </p:nvSpPr>
-        <p:spPr>
-          <a:xfrm>
-            <a:off x="2489545" y="3310128"/>
-            <a:ext cx="1609344" cy="457200"/>
-          </a:xfrm>
-          <a:prstGeom prst="rect">
-            <a:avLst/>
-          </a:prstGeom>
-          <a:noFill/>
-          <a:ln/>
-        </p:spPr>
-        <p:txBody>
-          <a:bodyPr wrap="square" lIns="0" tIns="0" rIns="0" bIns="0" rtlCol="0" anchor="t"/>
+              <a:t>Shaft sensors</a:t>
+            </a:r>
+            <a:endParaRPr lang="en-US" sz="1400" dirty="0"/>
+          </a:p>
+        </p:txBody>
+      </p:sp>
+      <p:sp>
+        <p:nvSpPr>
+          <p:cNvPr id="7" name="Text 5"/>
+          <p:cNvSpPr/>
+          <p:nvPr/>
+        </p:nvSpPr>
+        <p:spPr>
+          <a:xfrm>
+            <a:off x="914400" y="2816352"/>
+            <a:ext cx="2651760" cy="365760"/>
+          </a:xfrm>
+          <a:prstGeom prst="rect">
+            <a:avLst/>
+          </a:prstGeom>
+          <a:noFill/>
+          <a:ln/>
+        </p:spPr>
+        <p:txBody>
+          <a:bodyPr wrap="square" lIns="0" tIns="0" rIns="0" bIns="0" rtlCol="0" anchor="ctr"/>
           <a:lstStyle/>
           <a:p>
             <a:pPr algn="ctr" indent="0" marL="0">
               <a:buNone/>
             </a:pPr>
             <a:r>
-              <a:rPr lang="en-US" sz="1050" dirty="0">
+              <a:rPr lang="en-US" sz="1000" dirty="0">
                 <a:solidFill>
                   <a:srgbClr val="6E6248"/>
                 </a:solidFill>
@@ -1838,50 +1735,155 @@
                 <a:ea typeface="Calibri" pitchFamily="34" charset="-122"/>
                 <a:cs typeface="Calibri" pitchFamily="34" charset="-120"/>
               </a:rPr>
-              <a:t>windows · thresholds</a:t>
-            </a:r>
-            <a:endParaRPr lang="en-US" sz="1050" dirty="0"/>
-          </a:p>
-        </p:txBody>
-      </p:sp>
-      <p:sp>
-        <p:nvSpPr>
-          <p:cNvPr id="12" name="Shape 10"/>
-          <p:cNvSpPr/>
-          <p:nvPr/>
-        </p:nvSpPr>
-        <p:spPr>
-          <a:xfrm>
-            <a:off x="4098889" y="3154680"/>
-            <a:ext cx="258409" cy="0"/>
-          </a:xfrm>
-          <a:prstGeom prst="line">
-            <a:avLst/>
-          </a:prstGeom>
-          <a:noFill/>
-          <a:ln w="25400">
+              <a:t>10 · 2 shafts · 5 hazards</a:t>
+            </a:r>
+            <a:endParaRPr lang="en-US" sz="1000" dirty="0"/>
+          </a:p>
+        </p:txBody>
+      </p:sp>
+      <p:sp>
+        <p:nvSpPr>
+          <p:cNvPr id="8" name="Shape 6"/>
+          <p:cNvSpPr/>
+          <p:nvPr/>
+        </p:nvSpPr>
+        <p:spPr>
+          <a:xfrm>
+            <a:off x="914400" y="3520440"/>
+            <a:ext cx="2651760" cy="1005840"/>
+          </a:xfrm>
+          <a:prstGeom prst="roundRect">
+            <a:avLst>
+              <a:gd name="adj" fmla="val 7273"/>
+            </a:avLst>
+          </a:prstGeom>
+          <a:solidFill>
+            <a:srgbClr val="FFFFFF"/>
+          </a:solidFill>
+          <a:ln w="15240">
             <a:solidFill>
               <a:srgbClr val="9A8248"/>
             </a:solidFill>
             <a:prstDash val="solid"/>
+          </a:ln>
+        </p:spPr>
+      </p:sp>
+      <p:sp>
+        <p:nvSpPr>
+          <p:cNvPr id="9" name="Text 7"/>
+          <p:cNvSpPr/>
+          <p:nvPr/>
+        </p:nvSpPr>
+        <p:spPr>
+          <a:xfrm>
+            <a:off x="914400" y="3666744"/>
+            <a:ext cx="2651760" cy="365760"/>
+          </a:xfrm>
+          <a:prstGeom prst="rect">
+            <a:avLst/>
+          </a:prstGeom>
+          <a:noFill/>
+          <a:ln/>
+        </p:spPr>
+        <p:txBody>
+          <a:bodyPr wrap="square" lIns="0" tIns="0" rIns="0" bIns="0" rtlCol="0" anchor="ctr"/>
+          <a:lstStyle/>
+          <a:p>
+            <a:pPr algn="ctr" indent="0" marL="0">
+              <a:buNone/>
+            </a:pPr>
+            <a:r>
+              <a:rPr lang="en-US" sz="1400" b="1" dirty="0">
+                <a:solidFill>
+                  <a:srgbClr val="231D13"/>
+                </a:solidFill>
+                <a:latin typeface="Calibri" pitchFamily="34" charset="0"/>
+                <a:ea typeface="Calibri" pitchFamily="34" charset="-122"/>
+                <a:cs typeface="Calibri" pitchFamily="34" charset="-120"/>
+              </a:rPr>
+              <a:t>Fog node</a:t>
+            </a:r>
+            <a:endParaRPr lang="en-US" sz="1400" dirty="0"/>
+          </a:p>
+        </p:txBody>
+      </p:sp>
+      <p:sp>
+        <p:nvSpPr>
+          <p:cNvPr id="10" name="Text 8"/>
+          <p:cNvSpPr/>
+          <p:nvPr/>
+        </p:nvSpPr>
+        <p:spPr>
+          <a:xfrm>
+            <a:off x="914400" y="4050792"/>
+            <a:ext cx="2651760" cy="365760"/>
+          </a:xfrm>
+          <a:prstGeom prst="rect">
+            <a:avLst/>
+          </a:prstGeom>
+          <a:noFill/>
+          <a:ln/>
+        </p:spPr>
+        <p:txBody>
+          <a:bodyPr wrap="square" lIns="0" tIns="0" rIns="0" bIns="0" rtlCol="0" anchor="ctr"/>
+          <a:lstStyle/>
+          <a:p>
+            <a:pPr algn="ctr" indent="0" marL="0">
+              <a:buNone/>
+            </a:pPr>
+            <a:r>
+              <a:rPr lang="en-US" sz="1000" dirty="0">
+                <a:solidFill>
+                  <a:srgbClr val="6E6248"/>
+                </a:solidFill>
+                <a:latin typeface="Calibri" pitchFamily="34" charset="0"/>
+                <a:ea typeface="Calibri" pitchFamily="34" charset="-122"/>
+                <a:cs typeface="Calibri" pitchFamily="34" charset="-120"/>
+              </a:rPr>
+              <a:t>windows · thresholds</a:t>
+            </a:r>
+            <a:endParaRPr lang="en-US" sz="1000" dirty="0"/>
+          </a:p>
+        </p:txBody>
+      </p:sp>
+      <p:sp>
+        <p:nvSpPr>
+          <p:cNvPr id="11" name="Shape 9"/>
+          <p:cNvSpPr/>
+          <p:nvPr/>
+        </p:nvSpPr>
+        <p:spPr>
+          <a:xfrm>
+            <a:off x="3886200" y="3246120"/>
+            <a:ext cx="502920" cy="0"/>
+          </a:xfrm>
+          <a:prstGeom prst="line">
+            <a:avLst/>
+          </a:prstGeom>
+          <a:noFill/>
+          <a:ln w="31750">
+            <a:solidFill>
+              <a:srgbClr val="5A4420"/>
+            </a:solidFill>
+            <a:prstDash val="solid"/>
             <a:tailEnd type="triangle"/>
           </a:ln>
         </p:spPr>
       </p:sp>
       <p:sp>
         <p:nvSpPr>
-          <p:cNvPr id="13" name="Shape 11"/>
-          <p:cNvSpPr/>
-          <p:nvPr/>
-        </p:nvSpPr>
-        <p:spPr>
-          <a:xfrm>
-            <a:off x="4375587" y="2468880"/>
-            <a:ext cx="1572768" cy="1371600"/>
+          <p:cNvPr id="12" name="Shape 10"/>
+          <p:cNvSpPr/>
+          <p:nvPr/>
+        </p:nvSpPr>
+        <p:spPr>
+          <a:xfrm>
+            <a:off x="4572000" y="1554480"/>
+            <a:ext cx="6949440" cy="3383280"/>
           </a:xfrm>
           <a:prstGeom prst="roundRect">
             <a:avLst>
-              <a:gd name="adj" fmla="val 6667"/>
+              <a:gd name="adj" fmla="val 2703"/>
             </a:avLst>
           </a:prstGeom>
           <a:solidFill>
@@ -1897,99 +1899,145 @@
       </p:sp>
       <p:sp>
         <p:nvSpPr>
-          <p:cNvPr id="14" name="Shape 12"/>
-          <p:cNvSpPr/>
-          <p:nvPr/>
-        </p:nvSpPr>
-        <p:spPr>
-          <a:xfrm>
-            <a:off x="5061387" y="2670048"/>
-            <a:ext cx="201168" cy="201168"/>
-          </a:xfrm>
-          <a:prstGeom prst="ellipse">
-            <a:avLst/>
-          </a:prstGeom>
-          <a:solidFill>
-            <a:srgbClr val="5A4420"/>
-          </a:solidFill>
-          <a:ln/>
-        </p:spPr>
-      </p:sp>
-      <p:sp>
-        <p:nvSpPr>
-          <p:cNvPr id="15" name="Text 13"/>
-          <p:cNvSpPr/>
-          <p:nvPr/>
-        </p:nvSpPr>
-        <p:spPr>
-          <a:xfrm>
-            <a:off x="4329867" y="2926080"/>
-            <a:ext cx="1664208" cy="411480"/>
-          </a:xfrm>
-          <a:prstGeom prst="rect">
-            <a:avLst/>
-          </a:prstGeom>
-          <a:noFill/>
-          <a:ln/>
-        </p:spPr>
-        <p:txBody>
-          <a:bodyPr wrap="square" lIns="0" tIns="0" rIns="0" bIns="0" rtlCol="0" anchor="ctr"/>
+          <p:cNvPr id="13" name="Text 11"/>
+          <p:cNvSpPr/>
+          <p:nvPr/>
+        </p:nvSpPr>
+        <p:spPr>
+          <a:xfrm>
+            <a:off x="4572000" y="1691640"/>
+            <a:ext cx="6949440" cy="365760"/>
+          </a:xfrm>
+          <a:prstGeom prst="rect">
+            <a:avLst/>
+          </a:prstGeom>
+          <a:noFill/>
+          <a:ln/>
+        </p:spPr>
+        <p:txBody>
+          <a:bodyPr wrap="square" rtlCol="0" anchor="ctr"/>
           <a:lstStyle/>
           <a:p>
             <a:pPr algn="ctr" indent="0" marL="0">
               <a:buNone/>
             </a:pPr>
             <a:r>
-              <a:rPr lang="en-US" sz="1450" b="1" dirty="0">
-                <a:solidFill>
-                  <a:srgbClr val="231D13"/>
+              <a:rPr lang="en-US" sz="1200" b="1" spc="200" kern="0" dirty="0">
+                <a:solidFill>
+                  <a:srgbClr val="5A4420"/>
                 </a:solidFill>
                 <a:latin typeface="Calibri" pitchFamily="34" charset="0"/>
                 <a:ea typeface="Calibri" pitchFamily="34" charset="-122"/>
                 <a:cs typeface="Calibri" pitchFamily="34" charset="-120"/>
               </a:rPr>
-              <a:t>Amazon SQS</a:t>
-            </a:r>
-            <a:endParaRPr lang="en-US" sz="1450" dirty="0"/>
-          </a:p>
-        </p:txBody>
-      </p:sp>
-      <p:sp>
-        <p:nvSpPr>
-          <p:cNvPr id="16" name="Text 14"/>
-          <p:cNvSpPr/>
-          <p:nvPr/>
-        </p:nvSpPr>
-        <p:spPr>
-          <a:xfrm>
-            <a:off x="4357299" y="3310128"/>
-            <a:ext cx="1609344" cy="457200"/>
-          </a:xfrm>
-          <a:prstGeom prst="rect">
-            <a:avLst/>
-          </a:prstGeom>
-          <a:noFill/>
-          <a:ln/>
-        </p:spPr>
-        <p:txBody>
-          <a:bodyPr wrap="square" lIns="0" tIns="0" rIns="0" bIns="0" rtlCol="0" anchor="t"/>
+              <a:t>CLOUD (serverless)</a:t>
+            </a:r>
+            <a:endParaRPr lang="en-US" sz="1200" dirty="0"/>
+          </a:p>
+        </p:txBody>
+      </p:sp>
+      <p:sp>
+        <p:nvSpPr>
+          <p:cNvPr id="14" name="Shape 12"/>
+          <p:cNvSpPr/>
+          <p:nvPr/>
+        </p:nvSpPr>
+        <p:spPr>
+          <a:xfrm>
+            <a:off x="4846320" y="2651760"/>
+            <a:ext cx="1463040" cy="1371600"/>
+          </a:xfrm>
+          <a:prstGeom prst="roundRect">
+            <a:avLst>
+              <a:gd name="adj" fmla="val 5333"/>
+            </a:avLst>
+          </a:prstGeom>
+          <a:solidFill>
+            <a:srgbClr val="FFFFFF"/>
+          </a:solidFill>
+          <a:ln w="15240">
+            <a:solidFill>
+              <a:srgbClr val="5A4420"/>
+            </a:solidFill>
+            <a:prstDash val="solid"/>
+          </a:ln>
+        </p:spPr>
+      </p:sp>
+      <p:sp>
+        <p:nvSpPr>
+          <p:cNvPr id="15" name="Text 13"/>
+          <p:cNvSpPr/>
+          <p:nvPr/>
+        </p:nvSpPr>
+        <p:spPr>
+          <a:xfrm>
+            <a:off x="4800600" y="2907792"/>
+            <a:ext cx="1554480" cy="457200"/>
+          </a:xfrm>
+          <a:prstGeom prst="rect">
+            <a:avLst/>
+          </a:prstGeom>
+          <a:noFill/>
+          <a:ln/>
+        </p:spPr>
+        <p:txBody>
+          <a:bodyPr wrap="square" lIns="0" tIns="0" rIns="0" bIns="0" rtlCol="0" anchor="ctr"/>
           <a:lstStyle/>
           <a:p>
             <a:pPr algn="ctr" indent="0" marL="0">
               <a:buNone/>
             </a:pPr>
             <a:r>
-              <a:rPr lang="en-US" sz="1050" dirty="0">
-                <a:solidFill>
-                  <a:srgbClr val="6E6248"/>
+              <a:rPr lang="en-US" sz="1250" b="1" dirty="0">
+                <a:solidFill>
+                  <a:srgbClr val="231D13"/>
                 </a:solidFill>
                 <a:latin typeface="Calibri" pitchFamily="34" charset="0"/>
                 <a:ea typeface="Calibri" pitchFamily="34" charset="-122"/>
                 <a:cs typeface="Calibri" pitchFamily="34" charset="-120"/>
               </a:rPr>
+              <a:t>Amazon SQS</a:t>
+            </a:r>
+            <a:endParaRPr lang="en-US" sz="1250" dirty="0"/>
+          </a:p>
+        </p:txBody>
+      </p:sp>
+      <p:sp>
+        <p:nvSpPr>
+          <p:cNvPr id="16" name="Text 14"/>
+          <p:cNvSpPr/>
+          <p:nvPr/>
+        </p:nvSpPr>
+        <p:spPr>
+          <a:xfrm>
+            <a:off x="4828032" y="3401568"/>
+            <a:ext cx="1499616" cy="457200"/>
+          </a:xfrm>
+          <a:prstGeom prst="rect">
+            <a:avLst/>
+          </a:prstGeom>
+          <a:noFill/>
+          <a:ln/>
+        </p:spPr>
+        <p:txBody>
+          <a:bodyPr wrap="square" lIns="0" tIns="0" rIns="0" bIns="0" rtlCol="0" anchor="ctr"/>
+          <a:lstStyle/>
+          <a:p>
+            <a:pPr algn="ctr" indent="0" marL="0">
+              <a:buNone/>
+            </a:pPr>
+            <a:r>
+              <a:rPr lang="en-US" sz="900" dirty="0">
+                <a:solidFill>
+                  <a:srgbClr val="6E6248"/>
+                </a:solidFill>
+                <a:latin typeface="Calibri" pitchFamily="34" charset="0"/>
+                <a:ea typeface="Calibri" pitchFamily="34" charset="-122"/>
+                <a:cs typeface="Calibri" pitchFamily="34" charset="-120"/>
+              </a:rPr>
               <a:t>batches ≤10</a:t>
             </a:r>
-            <a:endParaRPr lang="en-US" sz="1050" dirty="0"/>
+            <a:endParaRPr lang="en-US" sz="900" dirty="0"/>
           </a:p>
         </p:txBody>
       </p:sp>
@@ -2001,14 +2049,14 @@
         </p:nvSpPr>
         <p:spPr>
           <a:xfrm>
-            <a:off x="5966643" y="3154680"/>
-            <a:ext cx="258409" cy="0"/>
+            <a:off x="6318504" y="3337560"/>
+            <a:ext cx="164592" cy="0"/>
           </a:xfrm>
           <a:prstGeom prst="line">
             <a:avLst/>
           </a:prstGeom>
           <a:noFill/>
-          <a:ln w="25400">
+          <a:ln w="20320">
             <a:solidFill>
               <a:srgbClr val="9A8248"/>
             </a:solidFill>
@@ -2025,18 +2073,18 @@
         </p:nvSpPr>
         <p:spPr>
           <a:xfrm>
-            <a:off x="6243340" y="2468880"/>
-            <a:ext cx="1572768" cy="1371600"/>
+            <a:off x="6492240" y="2651760"/>
+            <a:ext cx="1463040" cy="1371600"/>
           </a:xfrm>
           <a:prstGeom prst="roundRect">
             <a:avLst>
-              <a:gd name="adj" fmla="val 6667"/>
+              <a:gd name="adj" fmla="val 5333"/>
             </a:avLst>
           </a:prstGeom>
           <a:solidFill>
-            <a:srgbClr val="F4EFE4"/>
+            <a:srgbClr val="FFFFFF"/>
           </a:solidFill>
-          <a:ln w="19050">
+          <a:ln w="15240">
             <a:solidFill>
               <a:srgbClr val="5A4420"/>
             </a:solidFill>
@@ -2046,34 +2094,14 @@
       </p:sp>
       <p:sp>
         <p:nvSpPr>
-          <p:cNvPr id="19" name="Shape 17"/>
-          <p:cNvSpPr/>
-          <p:nvPr/>
-        </p:nvSpPr>
-        <p:spPr>
-          <a:xfrm>
-            <a:off x="6929140" y="2670048"/>
-            <a:ext cx="201168" cy="201168"/>
-          </a:xfrm>
-          <a:prstGeom prst="ellipse">
-            <a:avLst/>
-          </a:prstGeom>
-          <a:solidFill>
-            <a:srgbClr val="5A4420"/>
-          </a:solidFill>
-          <a:ln/>
-        </p:spPr>
-      </p:sp>
-      <p:sp>
-        <p:nvSpPr>
-          <p:cNvPr id="20" name="Text 18"/>
-          <p:cNvSpPr/>
-          <p:nvPr/>
-        </p:nvSpPr>
-        <p:spPr>
-          <a:xfrm>
-            <a:off x="6197620" y="2926080"/>
-            <a:ext cx="1664208" cy="411480"/>
+          <p:cNvPr id="19" name="Text 17"/>
+          <p:cNvSpPr/>
+          <p:nvPr/>
+        </p:nvSpPr>
+        <p:spPr>
+          <a:xfrm>
+            <a:off x="6446520" y="2907792"/>
+            <a:ext cx="1554480" cy="457200"/>
           </a:xfrm>
           <a:prstGeom prst="rect">
             <a:avLst/>
@@ -2089,7 +2117,7 @@
               <a:buNone/>
             </a:pPr>
             <a:r>
-              <a:rPr lang="en-US" sz="1450" b="1" dirty="0">
+              <a:rPr lang="en-US" sz="1250" b="1" dirty="0">
                 <a:solidFill>
                   <a:srgbClr val="231D13"/>
                 </a:solidFill>
@@ -2099,36 +2127,36 @@
               </a:rPr>
               <a:t>AWS Lambda</a:t>
             </a:r>
-            <a:endParaRPr lang="en-US" sz="1450" dirty="0"/>
-          </a:p>
-        </p:txBody>
-      </p:sp>
-      <p:sp>
-        <p:nvSpPr>
-          <p:cNvPr id="21" name="Text 19"/>
-          <p:cNvSpPr/>
-          <p:nvPr/>
-        </p:nvSpPr>
-        <p:spPr>
-          <a:xfrm>
-            <a:off x="6225052" y="3310128"/>
-            <a:ext cx="1609344" cy="457200"/>
-          </a:xfrm>
-          <a:prstGeom prst="rect">
-            <a:avLst/>
-          </a:prstGeom>
-          <a:noFill/>
-          <a:ln/>
-        </p:spPr>
-        <p:txBody>
-          <a:bodyPr wrap="square" lIns="0" tIns="0" rIns="0" bIns="0" rtlCol="0" anchor="t"/>
+            <a:endParaRPr lang="en-US" sz="1250" dirty="0"/>
+          </a:p>
+        </p:txBody>
+      </p:sp>
+      <p:sp>
+        <p:nvSpPr>
+          <p:cNvPr id="20" name="Text 18"/>
+          <p:cNvSpPr/>
+          <p:nvPr/>
+        </p:nvSpPr>
+        <p:spPr>
+          <a:xfrm>
+            <a:off x="6473952" y="3401568"/>
+            <a:ext cx="1499616" cy="457200"/>
+          </a:xfrm>
+          <a:prstGeom prst="rect">
+            <a:avLst/>
+          </a:prstGeom>
+          <a:noFill/>
+          <a:ln/>
+        </p:spPr>
+        <p:txBody>
+          <a:bodyPr wrap="square" lIns="0" tIns="0" rIns="0" bIns="0" rtlCol="0" anchor="ctr"/>
           <a:lstStyle/>
           <a:p>
             <a:pPr algn="ctr" indent="0" marL="0">
               <a:buNone/>
             </a:pPr>
             <a:r>
-              <a:rPr lang="en-US" sz="1050" dirty="0">
+              <a:rPr lang="en-US" sz="900" dirty="0">
                 <a:solidFill>
                   <a:srgbClr val="6E6248"/>
                 </a:solidFill>
@@ -2138,26 +2166,26 @@
               </a:rPr>
               <a:t>java17 ingest</a:t>
             </a:r>
-            <a:endParaRPr lang="en-US" sz="1050" dirty="0"/>
-          </a:p>
-        </p:txBody>
-      </p:sp>
-      <p:sp>
-        <p:nvSpPr>
-          <p:cNvPr id="22" name="Shape 20"/>
-          <p:cNvSpPr/>
-          <p:nvPr/>
-        </p:nvSpPr>
-        <p:spPr>
-          <a:xfrm>
-            <a:off x="7834396" y="3154680"/>
-            <a:ext cx="258409" cy="0"/>
+            <a:endParaRPr lang="en-US" sz="900" dirty="0"/>
+          </a:p>
+        </p:txBody>
+      </p:sp>
+      <p:sp>
+        <p:nvSpPr>
+          <p:cNvPr id="21" name="Shape 19"/>
+          <p:cNvSpPr/>
+          <p:nvPr/>
+        </p:nvSpPr>
+        <p:spPr>
+          <a:xfrm>
+            <a:off x="7964424" y="3337560"/>
+            <a:ext cx="164592" cy="0"/>
           </a:xfrm>
           <a:prstGeom prst="line">
             <a:avLst/>
           </a:prstGeom>
           <a:noFill/>
-          <a:ln w="25400">
+          <a:ln w="20320">
             <a:solidFill>
               <a:srgbClr val="9A8248"/>
             </a:solidFill>
@@ -2168,24 +2196,24 @@
       </p:sp>
       <p:sp>
         <p:nvSpPr>
-          <p:cNvPr id="23" name="Shape 21"/>
-          <p:cNvSpPr/>
-          <p:nvPr/>
-        </p:nvSpPr>
-        <p:spPr>
-          <a:xfrm>
-            <a:off x="8111094" y="2468880"/>
-            <a:ext cx="1572768" cy="1371600"/>
+          <p:cNvPr id="22" name="Shape 20"/>
+          <p:cNvSpPr/>
+          <p:nvPr/>
+        </p:nvSpPr>
+        <p:spPr>
+          <a:xfrm>
+            <a:off x="8138160" y="2651760"/>
+            <a:ext cx="1463040" cy="1371600"/>
           </a:xfrm>
           <a:prstGeom prst="roundRect">
             <a:avLst>
-              <a:gd name="adj" fmla="val 6667"/>
+              <a:gd name="adj" fmla="val 5333"/>
             </a:avLst>
           </a:prstGeom>
           <a:solidFill>
-            <a:srgbClr val="F4EFE4"/>
+            <a:srgbClr val="FFFFFF"/>
           </a:solidFill>
-          <a:ln w="19050">
+          <a:ln w="15240">
             <a:solidFill>
               <a:srgbClr val="5A4420"/>
             </a:solidFill>
@@ -2195,34 +2223,14 @@
       </p:sp>
       <p:sp>
         <p:nvSpPr>
-          <p:cNvPr id="24" name="Shape 22"/>
-          <p:cNvSpPr/>
-          <p:nvPr/>
-        </p:nvSpPr>
-        <p:spPr>
-          <a:xfrm>
-            <a:off x="8796894" y="2670048"/>
-            <a:ext cx="201168" cy="201168"/>
-          </a:xfrm>
-          <a:prstGeom prst="ellipse">
-            <a:avLst/>
-          </a:prstGeom>
-          <a:solidFill>
-            <a:srgbClr val="5A4420"/>
-          </a:solidFill>
-          <a:ln/>
-        </p:spPr>
-      </p:sp>
-      <p:sp>
-        <p:nvSpPr>
-          <p:cNvPr id="25" name="Text 23"/>
-          <p:cNvSpPr/>
-          <p:nvPr/>
-        </p:nvSpPr>
-        <p:spPr>
-          <a:xfrm>
-            <a:off x="8065374" y="2926080"/>
-            <a:ext cx="1664208" cy="411480"/>
+          <p:cNvPr id="23" name="Text 21"/>
+          <p:cNvSpPr/>
+          <p:nvPr/>
+        </p:nvSpPr>
+        <p:spPr>
+          <a:xfrm>
+            <a:off x="8092440" y="2907792"/>
+            <a:ext cx="1554480" cy="457200"/>
           </a:xfrm>
           <a:prstGeom prst="rect">
             <a:avLst/>
@@ -2238,7 +2246,7 @@
               <a:buNone/>
             </a:pPr>
             <a:r>
-              <a:rPr lang="en-US" sz="1450" b="1" dirty="0">
+              <a:rPr lang="en-US" sz="1250" b="1" dirty="0">
                 <a:solidFill>
                   <a:srgbClr val="231D13"/>
                 </a:solidFill>
@@ -2248,36 +2256,36 @@
               </a:rPr>
               <a:t>DynamoDB</a:t>
             </a:r>
-            <a:endParaRPr lang="en-US" sz="1450" dirty="0"/>
-          </a:p>
-        </p:txBody>
-      </p:sp>
-      <p:sp>
-        <p:nvSpPr>
-          <p:cNvPr id="26" name="Text 24"/>
-          <p:cNvSpPr/>
-          <p:nvPr/>
-        </p:nvSpPr>
-        <p:spPr>
-          <a:xfrm>
-            <a:off x="8092806" y="3310128"/>
-            <a:ext cx="1609344" cy="457200"/>
-          </a:xfrm>
-          <a:prstGeom prst="rect">
-            <a:avLst/>
-          </a:prstGeom>
-          <a:noFill/>
-          <a:ln/>
-        </p:spPr>
-        <p:txBody>
-          <a:bodyPr wrap="square" lIns="0" tIns="0" rIns="0" bIns="0" rtlCol="0" anchor="t"/>
+            <a:endParaRPr lang="en-US" sz="1250" dirty="0"/>
+          </a:p>
+        </p:txBody>
+      </p:sp>
+      <p:sp>
+        <p:nvSpPr>
+          <p:cNvPr id="24" name="Text 22"/>
+          <p:cNvSpPr/>
+          <p:nvPr/>
+        </p:nvSpPr>
+        <p:spPr>
+          <a:xfrm>
+            <a:off x="8119872" y="3401568"/>
+            <a:ext cx="1499616" cy="457200"/>
+          </a:xfrm>
+          <a:prstGeom prst="rect">
+            <a:avLst/>
+          </a:prstGeom>
+          <a:noFill/>
+          <a:ln/>
+        </p:spPr>
+        <p:txBody>
+          <a:bodyPr wrap="square" lIns="0" tIns="0" rIns="0" bIns="0" rtlCol="0" anchor="ctr"/>
           <a:lstStyle/>
           <a:p>
             <a:pPr algn="ctr" indent="0" marL="0">
               <a:buNone/>
             </a:pPr>
             <a:r>
-              <a:rPr lang="en-US" sz="1050" dirty="0">
+              <a:rPr lang="en-US" sz="900" dirty="0">
                 <a:solidFill>
                   <a:srgbClr val="6E6248"/>
                 </a:solidFill>
@@ -2287,26 +2295,26 @@
               </a:rPr>
               <a:t>by type · shaft</a:t>
             </a:r>
-            <a:endParaRPr lang="en-US" sz="1050" dirty="0"/>
-          </a:p>
-        </p:txBody>
-      </p:sp>
-      <p:sp>
-        <p:nvSpPr>
-          <p:cNvPr id="27" name="Shape 25"/>
-          <p:cNvSpPr/>
-          <p:nvPr/>
-        </p:nvSpPr>
-        <p:spPr>
-          <a:xfrm>
-            <a:off x="9702150" y="3154680"/>
-            <a:ext cx="258409" cy="0"/>
+            <a:endParaRPr lang="en-US" sz="900" dirty="0"/>
+          </a:p>
+        </p:txBody>
+      </p:sp>
+      <p:sp>
+        <p:nvSpPr>
+          <p:cNvPr id="25" name="Shape 23"/>
+          <p:cNvSpPr/>
+          <p:nvPr/>
+        </p:nvSpPr>
+        <p:spPr>
+          <a:xfrm>
+            <a:off x="9610344" y="3337560"/>
+            <a:ext cx="164592" cy="0"/>
           </a:xfrm>
           <a:prstGeom prst="line">
             <a:avLst/>
           </a:prstGeom>
           <a:noFill/>
-          <a:ln w="25400">
+          <a:ln w="20320">
             <a:solidFill>
               <a:srgbClr val="9A8248"/>
             </a:solidFill>
@@ -2317,24 +2325,24 @@
       </p:sp>
       <p:sp>
         <p:nvSpPr>
-          <p:cNvPr id="28" name="Shape 26"/>
-          <p:cNvSpPr/>
-          <p:nvPr/>
-        </p:nvSpPr>
-        <p:spPr>
-          <a:xfrm>
-            <a:off x="9978847" y="2468880"/>
-            <a:ext cx="1572768" cy="1371600"/>
+          <p:cNvPr id="26" name="Shape 24"/>
+          <p:cNvSpPr/>
+          <p:nvPr/>
+        </p:nvSpPr>
+        <p:spPr>
+          <a:xfrm>
+            <a:off x="9784080" y="2651760"/>
+            <a:ext cx="1463040" cy="1371600"/>
           </a:xfrm>
           <a:prstGeom prst="roundRect">
             <a:avLst>
-              <a:gd name="adj" fmla="val 6667"/>
+              <a:gd name="adj" fmla="val 5333"/>
             </a:avLst>
           </a:prstGeom>
           <a:solidFill>
-            <a:srgbClr val="F4EFE4"/>
+            <a:srgbClr val="FFFFFF"/>
           </a:solidFill>
-          <a:ln w="19050">
+          <a:ln w="15240">
             <a:solidFill>
               <a:srgbClr val="7C5F2A"/>
             </a:solidFill>
@@ -2344,34 +2352,14 @@
       </p:sp>
       <p:sp>
         <p:nvSpPr>
-          <p:cNvPr id="29" name="Shape 27"/>
-          <p:cNvSpPr/>
-          <p:nvPr/>
-        </p:nvSpPr>
-        <p:spPr>
-          <a:xfrm>
-            <a:off x="10664647" y="2670048"/>
-            <a:ext cx="201168" cy="201168"/>
-          </a:xfrm>
-          <a:prstGeom prst="ellipse">
-            <a:avLst/>
-          </a:prstGeom>
-          <a:solidFill>
-            <a:srgbClr val="7C5F2A"/>
-          </a:solidFill>
-          <a:ln/>
-        </p:spPr>
-      </p:sp>
-      <p:sp>
-        <p:nvSpPr>
-          <p:cNvPr id="30" name="Text 28"/>
-          <p:cNvSpPr/>
-          <p:nvPr/>
-        </p:nvSpPr>
-        <p:spPr>
-          <a:xfrm>
-            <a:off x="9933127" y="2926080"/>
-            <a:ext cx="1664208" cy="411480"/>
+          <p:cNvPr id="27" name="Text 25"/>
+          <p:cNvSpPr/>
+          <p:nvPr/>
+        </p:nvSpPr>
+        <p:spPr>
+          <a:xfrm>
+            <a:off x="9738360" y="2907792"/>
+            <a:ext cx="1554480" cy="457200"/>
           </a:xfrm>
           <a:prstGeom prst="rect">
             <a:avLst/>
@@ -2387,7 +2375,7 @@
               <a:buNone/>
             </a:pPr>
             <a:r>
-              <a:rPr lang="en-US" sz="1450" b="1" dirty="0">
+              <a:rPr lang="en-US" sz="1250" b="1" dirty="0">
                 <a:solidFill>
                   <a:srgbClr val="231D13"/>
                 </a:solidFill>
@@ -2397,36 +2385,36 @@
               </a:rPr>
               <a:t>API GW + S3</a:t>
             </a:r>
-            <a:endParaRPr lang="en-US" sz="1450" dirty="0"/>
-          </a:p>
-        </p:txBody>
-      </p:sp>
-      <p:sp>
-        <p:nvSpPr>
-          <p:cNvPr id="31" name="Text 29"/>
-          <p:cNvSpPr/>
-          <p:nvPr/>
-        </p:nvSpPr>
-        <p:spPr>
-          <a:xfrm>
-            <a:off x="9960559" y="3310128"/>
-            <a:ext cx="1609344" cy="457200"/>
-          </a:xfrm>
-          <a:prstGeom prst="rect">
-            <a:avLst/>
-          </a:prstGeom>
-          <a:noFill/>
-          <a:ln/>
-        </p:spPr>
-        <p:txBody>
-          <a:bodyPr wrap="square" lIns="0" tIns="0" rIns="0" bIns="0" rtlCol="0" anchor="t"/>
+            <a:endParaRPr lang="en-US" sz="1250" dirty="0"/>
+          </a:p>
+        </p:txBody>
+      </p:sp>
+      <p:sp>
+        <p:nvSpPr>
+          <p:cNvPr id="28" name="Text 26"/>
+          <p:cNvSpPr/>
+          <p:nvPr/>
+        </p:nvSpPr>
+        <p:spPr>
+          <a:xfrm>
+            <a:off x="9765792" y="3401568"/>
+            <a:ext cx="1499616" cy="457200"/>
+          </a:xfrm>
+          <a:prstGeom prst="rect">
+            <a:avLst/>
+          </a:prstGeom>
+          <a:noFill/>
+          <a:ln/>
+        </p:spPr>
+        <p:txBody>
+          <a:bodyPr wrap="square" lIns="0" tIns="0" rIns="0" bIns="0" rtlCol="0" anchor="ctr"/>
           <a:lstStyle/>
           <a:p>
             <a:pPr algn="ctr" indent="0" marL="0">
               <a:buNone/>
             </a:pPr>
             <a:r>
-              <a:rPr lang="en-US" sz="1050" dirty="0">
+              <a:rPr lang="en-US" sz="900" dirty="0">
                 <a:solidFill>
                   <a:srgbClr val="6E6248"/>
                 </a:solidFill>
@@ -2436,98 +2424,20 @@
               </a:rPr>
               <a:t>SAFE/CAUTION/DANGER</a:t>
             </a:r>
-            <a:endParaRPr lang="en-US" sz="1050" dirty="0"/>
-          </a:p>
-        </p:txBody>
-      </p:sp>
-      <p:sp>
-        <p:nvSpPr>
-          <p:cNvPr id="32" name="Text 30"/>
-          <p:cNvSpPr/>
-          <p:nvPr/>
-        </p:nvSpPr>
-        <p:spPr>
-          <a:xfrm>
-            <a:off x="640080" y="3977640"/>
-            <a:ext cx="3440521" cy="274320"/>
-          </a:xfrm>
-          <a:prstGeom prst="rect">
-            <a:avLst/>
-          </a:prstGeom>
-          <a:noFill/>
-          <a:ln/>
-        </p:spPr>
-        <p:txBody>
-          <a:bodyPr wrap="square" rtlCol="0" anchor="ctr"/>
-          <a:lstStyle/>
-          <a:p>
-            <a:pPr algn="ctr" indent="0" marL="0">
-              <a:buNone/>
-            </a:pPr>
-            <a:r>
-              <a:rPr lang="en-US" sz="1100" b="1" spc="200" kern="0" dirty="0">
-                <a:solidFill>
-                  <a:srgbClr val="9A8248"/>
-                </a:solidFill>
-                <a:latin typeface="Calibri" pitchFamily="34" charset="0"/>
-                <a:ea typeface="Calibri" pitchFamily="34" charset="-122"/>
-                <a:cs typeface="Calibri" pitchFamily="34" charset="-120"/>
-              </a:rPr>
-              <a:t>EDGE</a:t>
-            </a:r>
-            <a:endParaRPr lang="en-US" sz="1100" dirty="0"/>
-          </a:p>
-        </p:txBody>
-      </p:sp>
-      <p:sp>
-        <p:nvSpPr>
-          <p:cNvPr id="33" name="Text 31"/>
-          <p:cNvSpPr/>
-          <p:nvPr/>
-        </p:nvSpPr>
-        <p:spPr>
-          <a:xfrm>
-            <a:off x="4375587" y="3977640"/>
-            <a:ext cx="7176028" cy="274320"/>
-          </a:xfrm>
-          <a:prstGeom prst="rect">
-            <a:avLst/>
-          </a:prstGeom>
-          <a:noFill/>
-          <a:ln/>
-        </p:spPr>
-        <p:txBody>
-          <a:bodyPr wrap="square" rtlCol="0" anchor="ctr"/>
-          <a:lstStyle/>
-          <a:p>
-            <a:pPr algn="ctr" indent="0" marL="0">
-              <a:buNone/>
-            </a:pPr>
-            <a:r>
-              <a:rPr lang="en-US" sz="1100" b="1" spc="200" kern="0" dirty="0">
-                <a:solidFill>
-                  <a:srgbClr val="5A4420"/>
-                </a:solidFill>
-                <a:latin typeface="Calibri" pitchFamily="34" charset="0"/>
-                <a:ea typeface="Calibri" pitchFamily="34" charset="-122"/>
-                <a:cs typeface="Calibri" pitchFamily="34" charset="-120"/>
-              </a:rPr>
-              <a:t>CLOUD</a:t>
-            </a:r>
-            <a:endParaRPr lang="en-US" sz="1100" dirty="0"/>
-          </a:p>
-        </p:txBody>
-      </p:sp>
-      <p:sp>
-        <p:nvSpPr>
-          <p:cNvPr id="34" name="Text 32"/>
-          <p:cNvSpPr/>
-          <p:nvPr/>
-        </p:nvSpPr>
-        <p:spPr>
-          <a:xfrm>
-            <a:off x="640080" y="5212080"/>
-            <a:ext cx="10972800" cy="640080"/>
+            <a:endParaRPr lang="en-US" sz="900" dirty="0"/>
+          </a:p>
+        </p:txBody>
+      </p:sp>
+      <p:sp>
+        <p:nvSpPr>
+          <p:cNvPr id="29" name="Text 27"/>
+          <p:cNvSpPr/>
+          <p:nvPr/>
+        </p:nvSpPr>
+        <p:spPr>
+          <a:xfrm>
+            <a:off x="640080" y="5257800"/>
+            <a:ext cx="10972800" cy="731520"/>
           </a:xfrm>
           <a:prstGeom prst="rect">
             <a:avLst/>
@@ -2669,34 +2579,14 @@
       </p:sp>
       <p:sp>
         <p:nvSpPr>
-          <p:cNvPr id="4" name="Shape 2"/>
-          <p:cNvSpPr/>
-          <p:nvPr/>
-        </p:nvSpPr>
-        <p:spPr>
-          <a:xfrm>
-            <a:off x="731520" y="1965960"/>
-            <a:ext cx="685800" cy="685800"/>
-          </a:xfrm>
-          <a:prstGeom prst="ellipse">
-            <a:avLst/>
-          </a:prstGeom>
-          <a:solidFill>
-            <a:srgbClr val="5A4420"/>
-          </a:solidFill>
-          <a:ln/>
-        </p:spPr>
-      </p:sp>
-      <p:sp>
-        <p:nvSpPr>
-          <p:cNvPr id="5" name="Text 3"/>
-          <p:cNvSpPr/>
-          <p:nvPr/>
-        </p:nvSpPr>
-        <p:spPr>
-          <a:xfrm>
-            <a:off x="731520" y="1965960"/>
-            <a:ext cx="685800" cy="685800"/>
+          <p:cNvPr id="4" name="Text 2"/>
+          <p:cNvSpPr/>
+          <p:nvPr/>
+        </p:nvSpPr>
+        <p:spPr>
+          <a:xfrm>
+            <a:off x="640080" y="1737360"/>
+            <a:ext cx="1097280" cy="1097280"/>
           </a:xfrm>
           <a:prstGeom prst="rect">
             <a:avLst/>
@@ -2708,13 +2598,13 @@
           <a:bodyPr wrap="square" lIns="0" tIns="0" rIns="0" bIns="0" rtlCol="0" anchor="ctr"/>
           <a:lstStyle/>
           <a:p>
-            <a:pPr algn="ctr" indent="0" marL="0">
-              <a:buNone/>
-            </a:pPr>
-            <a:r>
-              <a:rPr lang="en-US" sz="2600" b="1" dirty="0">
-                <a:solidFill>
-                  <a:srgbClr val="FFFFFF"/>
+            <a:pPr indent="0" marL="0">
+              <a:buNone/>
+            </a:pPr>
+            <a:r>
+              <a:rPr lang="en-US" sz="5400" b="1" dirty="0">
+                <a:solidFill>
+                  <a:srgbClr val="F4EFE4"/>
                 </a:solidFill>
                 <a:latin typeface="Times New Roman" pitchFamily="34" charset="0"/>
                 <a:ea typeface="Times New Roman" pitchFamily="34" charset="-122"/>
@@ -2722,9 +2612,32 @@
               </a:rPr>
               <a:t>1</a:t>
             </a:r>
-            <a:endParaRPr lang="en-US" sz="2600" dirty="0"/>
-          </a:p>
-        </p:txBody>
+            <a:endParaRPr lang="en-US" sz="5400" dirty="0"/>
+          </a:p>
+        </p:txBody>
+      </p:sp>
+      <p:sp>
+        <p:nvSpPr>
+          <p:cNvPr id="5" name="Shape 3"/>
+          <p:cNvSpPr/>
+          <p:nvPr/>
+        </p:nvSpPr>
+        <p:spPr>
+          <a:xfrm>
+            <a:off x="1828800" y="1920240"/>
+            <a:ext cx="0" cy="1051560"/>
+          </a:xfrm>
+          <a:prstGeom prst="line">
+            <a:avLst/>
+          </a:prstGeom>
+          <a:noFill/>
+          <a:ln w="25400">
+            <a:solidFill>
+              <a:srgbClr val="7C5F2A"/>
+            </a:solidFill>
+            <a:prstDash val="solid"/>
+          </a:ln>
+        </p:spPr>
       </p:sp>
       <p:sp>
         <p:nvSpPr>
@@ -2734,8 +2647,8 @@
         </p:nvSpPr>
         <p:spPr>
           <a:xfrm>
-            <a:off x="1691640" y="1920240"/>
-            <a:ext cx="9875520" cy="411480"/>
+            <a:off x="2057400" y="1874520"/>
+            <a:ext cx="9509760" cy="411480"/>
           </a:xfrm>
           <a:prstGeom prst="rect">
             <a:avLst/>
@@ -2759,7 +2672,7 @@
                 <a:ea typeface="Calibri" pitchFamily="34" charset="-122"/>
                 <a:cs typeface="Calibri" pitchFamily="34" charset="-120"/>
               </a:rPr>
-              <a:t>Pipeline health, all green</a:t>
+              <a:t>SAFE, CAUTION or DANGER per shaft</a:t>
             </a:r>
             <a:endParaRPr lang="en-US" sz="1800" dirty="0"/>
           </a:p>
@@ -2773,8 +2686,8 @@
         </p:nvSpPr>
         <p:spPr>
           <a:xfrm>
-            <a:off x="1691640" y="2340864"/>
-            <a:ext cx="9875520" cy="640080"/>
+            <a:off x="2057400" y="2313432"/>
+            <a:ext cx="9509760" cy="822960"/>
           </a:xfrm>
           <a:prstGeom prst="rect">
             <a:avLst/>
@@ -2798,7 +2711,7 @@
                 <a:ea typeface="Calibri" pitchFamily="34" charset="-122"/>
                 <a:cs typeface="Calibri" pitchFamily="34" charset="-120"/>
               </a:rPr>
-              <a:t>All four checks reported true on the very first check after deployment.</a:t>
+              <a:t>Each shaft carries a single live verdict rolled up from methane, CO, dust, vibration and airflow against their hard limits.</a:t>
             </a:r>
             <a:endParaRPr lang="en-US" sz="1350" dirty="0"/>
           </a:p>
@@ -2806,34 +2719,14 @@
       </p:sp>
       <p:sp>
         <p:nvSpPr>
-          <p:cNvPr id="8" name="Shape 6"/>
-          <p:cNvSpPr/>
-          <p:nvPr/>
-        </p:nvSpPr>
-        <p:spPr>
-          <a:xfrm>
-            <a:off x="731520" y="3383280"/>
-            <a:ext cx="685800" cy="685800"/>
-          </a:xfrm>
-          <a:prstGeom prst="ellipse">
-            <a:avLst/>
-          </a:prstGeom>
-          <a:solidFill>
-            <a:srgbClr val="5A4420"/>
-          </a:solidFill>
-          <a:ln/>
-        </p:spPr>
-      </p:sp>
-      <p:sp>
-        <p:nvSpPr>
-          <p:cNvPr id="9" name="Text 7"/>
-          <p:cNvSpPr/>
-          <p:nvPr/>
-        </p:nvSpPr>
-        <p:spPr>
-          <a:xfrm>
-            <a:off x="731520" y="3383280"/>
-            <a:ext cx="685800" cy="685800"/>
+          <p:cNvPr id="8" name="Text 6"/>
+          <p:cNvSpPr/>
+          <p:nvPr/>
+        </p:nvSpPr>
+        <p:spPr>
+          <a:xfrm>
+            <a:off x="640080" y="3200400"/>
+            <a:ext cx="1097280" cy="1097280"/>
           </a:xfrm>
           <a:prstGeom prst="rect">
             <a:avLst/>
@@ -2845,13 +2738,13 @@
           <a:bodyPr wrap="square" lIns="0" tIns="0" rIns="0" bIns="0" rtlCol="0" anchor="ctr"/>
           <a:lstStyle/>
           <a:p>
-            <a:pPr algn="ctr" indent="0" marL="0">
-              <a:buNone/>
-            </a:pPr>
-            <a:r>
-              <a:rPr lang="en-US" sz="2600" b="1" dirty="0">
-                <a:solidFill>
-                  <a:srgbClr val="FFFFFF"/>
+            <a:pPr indent="0" marL="0">
+              <a:buNone/>
+            </a:pPr>
+            <a:r>
+              <a:rPr lang="en-US" sz="5400" b="1" dirty="0">
+                <a:solidFill>
+                  <a:srgbClr val="F4EFE4"/>
                 </a:solidFill>
                 <a:latin typeface="Times New Roman" pitchFamily="34" charset="0"/>
                 <a:ea typeface="Times New Roman" pitchFamily="34" charset="-122"/>
@@ -2859,9 +2752,32 @@
               </a:rPr>
               <a:t>2</a:t>
             </a:r>
-            <a:endParaRPr lang="en-US" sz="2600" dirty="0"/>
-          </a:p>
-        </p:txBody>
+            <a:endParaRPr lang="en-US" sz="5400" dirty="0"/>
+          </a:p>
+        </p:txBody>
+      </p:sp>
+      <p:sp>
+        <p:nvSpPr>
+          <p:cNvPr id="9" name="Shape 7"/>
+          <p:cNvSpPr/>
+          <p:nvPr/>
+        </p:nvSpPr>
+        <p:spPr>
+          <a:xfrm>
+            <a:off x="1828800" y="3383280"/>
+            <a:ext cx="0" cy="1051560"/>
+          </a:xfrm>
+          <a:prstGeom prst="line">
+            <a:avLst/>
+          </a:prstGeom>
+          <a:noFill/>
+          <a:ln w="25400">
+            <a:solidFill>
+              <a:srgbClr val="7C5F2A"/>
+            </a:solidFill>
+            <a:prstDash val="solid"/>
+          </a:ln>
+        </p:spPr>
       </p:sp>
       <p:sp>
         <p:nvSpPr>
@@ -2871,8 +2787,8 @@
         </p:nvSpPr>
         <p:spPr>
           <a:xfrm>
-            <a:off x="1691640" y="3337560"/>
-            <a:ext cx="9875520" cy="411480"/>
+            <a:off x="2057400" y="3337560"/>
+            <a:ext cx="9509760" cy="411480"/>
           </a:xfrm>
           <a:prstGeom prst="rect">
             <a:avLst/>
@@ -2896,7 +2812,7 @@
                 <a:ea typeface="Calibri" pitchFamily="34" charset="-122"/>
                 <a:cs typeface="Calibri" pitchFamily="34" charset="-120"/>
               </a:rPr>
-              <a:t>Two shafts, live</a:t>
+              <a:t>A DANGER classification on real data</a:t>
             </a:r>
             <a:endParaRPr lang="en-US" sz="1800" dirty="0"/>
           </a:p>
@@ -2910,8 +2826,8 @@
         </p:nvSpPr>
         <p:spPr>
           <a:xfrm>
-            <a:off x="1691640" y="3758184"/>
-            <a:ext cx="9875520" cy="640080"/>
+            <a:off x="2057400" y="3776472"/>
+            <a:ext cx="9509760" cy="822960"/>
           </a:xfrm>
           <a:prstGeom prst="rect">
             <a:avLst/>
@@ -2935,7 +2851,7 @@
                 <a:ea typeface="Calibri" pitchFamily="34" charset="-122"/>
                 <a:cs typeface="Calibri" pitchFamily="34" charset="-120"/>
               </a:rPr>
-              <a:t>SAFE, CAUTION or DANGER per shaft; a silica-dust breach classifies shaft A as DANGER while shaft B stays SAFE, zero CORS failures.</a:t>
+              <a:t>A silica-dust breach classifies shaft-A as DANGER while shaft-B holds SAFE, with zero console or CORS errors.</a:t>
             </a:r>
             <a:endParaRPr lang="en-US" sz="1350" dirty="0"/>
           </a:p>
@@ -2943,34 +2859,14 @@
       </p:sp>
       <p:sp>
         <p:nvSpPr>
-          <p:cNvPr id="12" name="Shape 10"/>
-          <p:cNvSpPr/>
-          <p:nvPr/>
-        </p:nvSpPr>
-        <p:spPr>
-          <a:xfrm>
-            <a:off x="731520" y="4800600"/>
-            <a:ext cx="685800" cy="685800"/>
-          </a:xfrm>
-          <a:prstGeom prst="ellipse">
-            <a:avLst/>
-          </a:prstGeom>
-          <a:solidFill>
-            <a:srgbClr val="5A4420"/>
-          </a:solidFill>
-          <a:ln/>
-        </p:spPr>
-      </p:sp>
-      <p:sp>
-        <p:nvSpPr>
-          <p:cNvPr id="13" name="Text 11"/>
-          <p:cNvSpPr/>
-          <p:nvPr/>
-        </p:nvSpPr>
-        <p:spPr>
-          <a:xfrm>
-            <a:off x="731520" y="4800600"/>
-            <a:ext cx="685800" cy="685800"/>
+          <p:cNvPr id="12" name="Text 10"/>
+          <p:cNvSpPr/>
+          <p:nvPr/>
+        </p:nvSpPr>
+        <p:spPr>
+          <a:xfrm>
+            <a:off x="640080" y="4663440"/>
+            <a:ext cx="1097280" cy="1097280"/>
           </a:xfrm>
           <a:prstGeom prst="rect">
             <a:avLst/>
@@ -2982,13 +2878,13 @@
           <a:bodyPr wrap="square" lIns="0" tIns="0" rIns="0" bIns="0" rtlCol="0" anchor="ctr"/>
           <a:lstStyle/>
           <a:p>
-            <a:pPr algn="ctr" indent="0" marL="0">
-              <a:buNone/>
-            </a:pPr>
-            <a:r>
-              <a:rPr lang="en-US" sz="2600" b="1" dirty="0">
-                <a:solidFill>
-                  <a:srgbClr val="FFFFFF"/>
+            <a:pPr indent="0" marL="0">
+              <a:buNone/>
+            </a:pPr>
+            <a:r>
+              <a:rPr lang="en-US" sz="5400" b="1" dirty="0">
+                <a:solidFill>
+                  <a:srgbClr val="F4EFE4"/>
                 </a:solidFill>
                 <a:latin typeface="Times New Roman" pitchFamily="34" charset="0"/>
                 <a:ea typeface="Times New Roman" pitchFamily="34" charset="-122"/>
@@ -2996,9 +2892,32 @@
               </a:rPr>
               <a:t>3</a:t>
             </a:r>
-            <a:endParaRPr lang="en-US" sz="2600" dirty="0"/>
-          </a:p>
-        </p:txBody>
+            <a:endParaRPr lang="en-US" sz="5400" dirty="0"/>
+          </a:p>
+        </p:txBody>
+      </p:sp>
+      <p:sp>
+        <p:nvSpPr>
+          <p:cNvPr id="13" name="Shape 11"/>
+          <p:cNvSpPr/>
+          <p:nvPr/>
+        </p:nvSpPr>
+        <p:spPr>
+          <a:xfrm>
+            <a:off x="1828800" y="4846320"/>
+            <a:ext cx="0" cy="1051560"/>
+          </a:xfrm>
+          <a:prstGeom prst="line">
+            <a:avLst/>
+          </a:prstGeom>
+          <a:noFill/>
+          <a:ln w="25400">
+            <a:solidFill>
+              <a:srgbClr val="7C5F2A"/>
+            </a:solidFill>
+            <a:prstDash val="solid"/>
+          </a:ln>
+        </p:spPr>
       </p:sp>
       <p:sp>
         <p:nvSpPr>
@@ -3008,8 +2927,8 @@
         </p:nvSpPr>
         <p:spPr>
           <a:xfrm>
-            <a:off x="1691640" y="4754880"/>
-            <a:ext cx="9875520" cy="411480"/>
+            <a:off x="2057400" y="4800600"/>
+            <a:ext cx="9509760" cy="411480"/>
           </a:xfrm>
           <a:prstGeom prst="rect">
             <a:avLst/>
@@ -3033,7 +2952,7 @@
                 <a:ea typeface="Calibri" pitchFamily="34" charset="-122"/>
                 <a:cs typeface="Calibri" pitchFamily="34" charset="-120"/>
               </a:rPr>
-              <a:t>Tested and scales</a:t>
+              <a:t>Data climbing live</a:t>
             </a:r>
             <a:endParaRPr lang="en-US" sz="1800" dirty="0"/>
           </a:p>
@@ -3047,8 +2966,8 @@
         </p:nvSpPr>
         <p:spPr>
           <a:xfrm>
-            <a:off x="1691640" y="5175504"/>
-            <a:ext cx="9875520" cy="640080"/>
+            <a:off x="2057400" y="5239512"/>
+            <a:ext cx="9509760" cy="822960"/>
           </a:xfrm>
           <a:prstGeom prst="rect">
             <a:avLst/>
@@ -3072,7 +2991,7 @@
                 <a:ea typeface="Calibri" pitchFamily="34" charset="-122"/>
                 <a:cs typeface="Calibri" pitchFamily="34" charset="-120"/>
               </a:rPr>
-              <a:t>90 automated tests pass across sensors, fog, processor and dashboard; stored readings passed 1,400 during verification.</a:t>
+              <a:t>Stored readings pass 1,400 during the verification window and keep rising, so the board reads live data.</a:t>
             </a:r>
             <a:endParaRPr lang="en-US" sz="1350" dirty="0"/>
           </a:p>
@@ -3086,7 +3005,7 @@
         </p:nvSpPr>
         <p:spPr>
           <a:xfrm>
-            <a:off x="640080" y="6263640"/>
+            <a:off x="640080" y="6309360"/>
             <a:ext cx="10972800" cy="365760"/>
           </a:xfrm>
           <a:prstGeom prst="rect">
@@ -3157,24 +3076,24 @@
         </p:nvSpPr>
         <p:spPr>
           <a:xfrm>
-            <a:off x="640080" y="640080"/>
-            <a:ext cx="10972800" cy="640080"/>
-          </a:xfrm>
-          <a:prstGeom prst="rect">
-            <a:avLst/>
-          </a:prstGeom>
-          <a:noFill/>
-          <a:ln/>
-        </p:spPr>
-        <p:txBody>
-          <a:bodyPr wrap="square" rtlCol="0" anchor="ctr"/>
+            <a:off x="640080" y="594360"/>
+            <a:ext cx="10972800" cy="822960"/>
+          </a:xfrm>
+          <a:prstGeom prst="rect">
+            <a:avLst/>
+          </a:prstGeom>
+          <a:noFill/>
+          <a:ln/>
+        </p:spPr>
+        <p:txBody>
+          <a:bodyPr wrap="square" rtlCol="0" anchor="t"/>
           <a:lstStyle/>
           <a:p>
             <a:pPr indent="0" marL="0">
               <a:buNone/>
             </a:pPr>
             <a:r>
-              <a:rPr lang="en-US" sz="3000" b="1" dirty="0">
+              <a:rPr lang="en-US" sz="2800" b="1" dirty="0">
                 <a:solidFill>
                   <a:srgbClr val="FFFFFF"/>
                 </a:solidFill>
@@ -3184,7 +3103,7 @@
               </a:rPr>
               <a:t>Hardest Part — a credential defect the audit caught first</a:t>
             </a:r>
-            <a:endParaRPr lang="en-US" sz="3000" dirty="0"/>
+            <a:endParaRPr lang="en-US" sz="2800" dirty="0"/>
           </a:p>
         </p:txBody>
       </p:sp>
@@ -3196,12 +3115,12 @@
         </p:nvSpPr>
         <p:spPr>
           <a:xfrm>
-            <a:off x="731520" y="1920240"/>
-            <a:ext cx="10698480" cy="1965960"/>
+            <a:off x="731520" y="1874520"/>
+            <a:ext cx="5212080" cy="4160520"/>
           </a:xfrm>
           <a:prstGeom prst="roundRect">
             <a:avLst>
-              <a:gd name="adj" fmla="val 4651"/>
+              <a:gd name="adj" fmla="val 2198"/>
             </a:avLst>
           </a:prstGeom>
           <a:solidFill>
@@ -3223,7 +3142,7 @@
         </p:nvSpPr>
         <p:spPr>
           <a:xfrm>
-            <a:off x="1005840" y="2103120"/>
+            <a:off x="1051560" y="2103120"/>
             <a:ext cx="3657600" cy="457200"/>
           </a:xfrm>
           <a:prstGeom prst="rect">
@@ -3262,8 +3181,8 @@
         </p:nvSpPr>
         <p:spPr>
           <a:xfrm>
-            <a:off x="1005840" y="2578608"/>
-            <a:ext cx="9966960" cy="1188720"/>
+            <a:off x="1051560" y="2651760"/>
+            <a:ext cx="4572000" cy="3200400"/>
           </a:xfrm>
           <a:prstGeom prst="rect">
             <a:avLst/>
@@ -3277,12 +3196,12 @@
           <a:p>
             <a:pPr indent="0" marL="0">
               <a:lnSpc>
-                <a:spcPct val="105000"/>
+                <a:spcPct val="110000"/>
               </a:lnSpc>
               <a:buNone/>
             </a:pPr>
             <a:r>
-              <a:rPr lang="en-US" sz="1300" dirty="0">
+              <a:rPr lang="en-US" sz="1350" dirty="0">
                 <a:solidFill>
                   <a:srgbClr val="E5D8BC"/>
                 </a:solidFill>
@@ -3292,7 +3211,7 @@
               </a:rPr>
               <a:t>All three AWS-facing classes — dashboard, processor and queue publisher — hardcoded a fixed pair of test credentials into every client they built. LocalStack expects exactly those test values, so all 90 tests passed and every local run looked perfect. On real AWS, the same pair overrides the IAM role, and every call to DynamoDB, SQS or Lambda would fail authentication.</a:t>
             </a:r>
-            <a:endParaRPr lang="en-US" sz="1300" dirty="0"/>
+            <a:endParaRPr lang="en-US" sz="1350" dirty="0"/>
           </a:p>
         </p:txBody>
       </p:sp>
@@ -3304,12 +3223,12 @@
         </p:nvSpPr>
         <p:spPr>
           <a:xfrm>
-            <a:off x="731520" y="4041648"/>
-            <a:ext cx="10698480" cy="1965960"/>
+            <a:off x="6263640" y="1874520"/>
+            <a:ext cx="5212080" cy="4160520"/>
           </a:xfrm>
           <a:prstGeom prst="roundRect">
             <a:avLst>
-              <a:gd name="adj" fmla="val 4651"/>
+              <a:gd name="adj" fmla="val 2198"/>
             </a:avLst>
           </a:prstGeom>
           <a:solidFill>
@@ -3331,7 +3250,7 @@
         </p:nvSpPr>
         <p:spPr>
           <a:xfrm>
-            <a:off x="1005840" y="4224528"/>
+            <a:off x="6583680" y="2103120"/>
             <a:ext cx="3657600" cy="457200"/>
           </a:xfrm>
           <a:prstGeom prst="rect">
@@ -3370,8 +3289,8 @@
         </p:nvSpPr>
         <p:spPr>
           <a:xfrm>
-            <a:off x="1005840" y="4700016"/>
-            <a:ext cx="9966960" cy="1188720"/>
+            <a:off x="6583680" y="2651760"/>
+            <a:ext cx="4572000" cy="3200400"/>
           </a:xfrm>
           <a:prstGeom prst="rect">
             <a:avLst/>
@@ -3385,12 +3304,12 @@
           <a:p>
             <a:pPr indent="0" marL="0">
               <a:lnSpc>
-                <a:spcPct val="105000"/>
+                <a:spcPct val="110000"/>
               </a:lnSpc>
               <a:buNone/>
             </a:pPr>
             <a:r>
-              <a:rPr lang="en-US" sz="1300" dirty="0">
+              <a:rPr lang="en-US" sz="1350" dirty="0">
                 <a:solidFill>
                   <a:srgbClr val="E5D8BC"/>
                 </a:solidFill>
@@ -3400,7 +3319,7 @@
               </a:rPr>
               <a:t>Build static credentials only when a LocalStack endpoint is configured; otherwise fall through to the Lambda role or EC2 instance profile. All three constructors were audited side by side before deployment — so the bug never reached the live account, and four of four health checks were true on the very first live check.</a:t>
             </a:r>
-            <a:endParaRPr lang="en-US" sz="1300" dirty="0"/>
+            <a:endParaRPr lang="en-US" sz="1350" dirty="0"/>
           </a:p>
         </p:txBody>
       </p:sp>

--- a/ppt/JaipalKasireddy_X25156381_smart-mining-safety.pptx
+++ b/ppt/JaipalKasireddy_X25156381_smart-mining-safety.pptx
@@ -3050,7 +3050,7 @@
     <p:bg>
       <p:bgPr>
         <a:solidFill>
-          <a:srgbClr val="241E14"/>
+          <a:srgbClr val="FFFFFF"/>
         </a:solidFill>
       </p:bgPr>
     </p:bg>
@@ -3076,7 +3076,7 @@
         </p:nvSpPr>
         <p:spPr>
           <a:xfrm>
-            <a:off x="640080" y="594360"/>
+            <a:off x="640080" y="502920"/>
             <a:ext cx="10972800" cy="822960"/>
           </a:xfrm>
           <a:prstGeom prst="rect">
@@ -3095,7 +3095,7 @@
             <a:r>
               <a:rPr lang="en-US" sz="2800" b="1" dirty="0">
                 <a:solidFill>
-                  <a:srgbClr val="FFFFFF"/>
+                  <a:srgbClr val="231D13"/>
                 </a:solidFill>
                 <a:latin typeface="Times New Roman" pitchFamily="34" charset="0"/>
                 <a:ea typeface="Times New Roman" pitchFamily="34" charset="-122"/>
@@ -3115,8 +3115,8 @@
         </p:nvSpPr>
         <p:spPr>
           <a:xfrm>
-            <a:off x="731520" y="1874520"/>
-            <a:ext cx="5212080" cy="4160520"/>
+            <a:off x="640080" y="1874520"/>
+            <a:ext cx="4937760" cy="4160520"/>
           </a:xfrm>
           <a:prstGeom prst="roundRect">
             <a:avLst>
@@ -3124,9 +3124,9 @@
             </a:avLst>
           </a:prstGeom>
           <a:solidFill>
-            <a:srgbClr val="342A17"/>
+            <a:srgbClr val="F4EFE4"/>
           </a:solidFill>
-          <a:ln w="15875">
+          <a:ln w="19050">
             <a:solidFill>
               <a:srgbClr val="D9A62E"/>
             </a:solidFill>
@@ -3142,7 +3142,7 @@
         </p:nvSpPr>
         <p:spPr>
           <a:xfrm>
-            <a:off x="1051560" y="2103120"/>
+            <a:off x="960120" y="2103120"/>
             <a:ext cx="3657600" cy="457200"/>
           </a:xfrm>
           <a:prstGeom prst="rect">
@@ -3181,8 +3181,8 @@
         </p:nvSpPr>
         <p:spPr>
           <a:xfrm>
-            <a:off x="1051560" y="2651760"/>
-            <a:ext cx="4572000" cy="3200400"/>
+            <a:off x="960120" y="2651760"/>
+            <a:ext cx="4343400" cy="3200400"/>
           </a:xfrm>
           <a:prstGeom prst="rect">
             <a:avLst/>
@@ -3196,14 +3196,14 @@
           <a:p>
             <a:pPr indent="0" marL="0">
               <a:lnSpc>
-                <a:spcPct val="110000"/>
+                <a:spcPct val="112000"/>
               </a:lnSpc>
               <a:buNone/>
             </a:pPr>
             <a:r>
               <a:rPr lang="en-US" sz="1350" dirty="0">
                 <a:solidFill>
-                  <a:srgbClr val="E5D8BC"/>
+                  <a:srgbClr val="231D13"/>
                 </a:solidFill>
                 <a:latin typeface="Calibri" pitchFamily="34" charset="0"/>
                 <a:ea typeface="Calibri" pitchFamily="34" charset="-122"/>
@@ -3223,8 +3223,8 @@
         </p:nvSpPr>
         <p:spPr>
           <a:xfrm>
-            <a:off x="6263640" y="1874520"/>
-            <a:ext cx="5212080" cy="4160520"/>
+            <a:off x="6611112" y="1874520"/>
+            <a:ext cx="4937760" cy="4160520"/>
           </a:xfrm>
           <a:prstGeom prst="roundRect">
             <a:avLst>
@@ -3232,11 +3232,11 @@
             </a:avLst>
           </a:prstGeom>
           <a:solidFill>
-            <a:srgbClr val="342A17"/>
+            <a:srgbClr val="F4EFE4"/>
           </a:solidFill>
-          <a:ln w="15875">
+          <a:ln w="19050">
             <a:solidFill>
-              <a:srgbClr val="9A8248"/>
+              <a:srgbClr val="7C5F2A"/>
             </a:solidFill>
             <a:prstDash val="solid"/>
           </a:ln>
@@ -3250,7 +3250,7 @@
         </p:nvSpPr>
         <p:spPr>
           <a:xfrm>
-            <a:off x="6583680" y="2103120"/>
+            <a:off x="6931152" y="2103120"/>
             <a:ext cx="3657600" cy="457200"/>
           </a:xfrm>
           <a:prstGeom prst="rect">
@@ -3269,7 +3269,7 @@
             <a:r>
               <a:rPr lang="en-US" sz="1900" b="1" dirty="0">
                 <a:solidFill>
-                  <a:srgbClr val="9A8248"/>
+                  <a:srgbClr val="7C5F2A"/>
                 </a:solidFill>
                 <a:latin typeface="Times New Roman" pitchFamily="34" charset="0"/>
                 <a:ea typeface="Times New Roman" pitchFamily="34" charset="-122"/>
@@ -3289,8 +3289,8 @@
         </p:nvSpPr>
         <p:spPr>
           <a:xfrm>
-            <a:off x="6583680" y="2651760"/>
-            <a:ext cx="4572000" cy="3200400"/>
+            <a:off x="6931152" y="2651760"/>
+            <a:ext cx="4343400" cy="3200400"/>
           </a:xfrm>
           <a:prstGeom prst="rect">
             <a:avLst/>
@@ -3304,14 +3304,14 @@
           <a:p>
             <a:pPr indent="0" marL="0">
               <a:lnSpc>
-                <a:spcPct val="110000"/>
+                <a:spcPct val="112000"/>
               </a:lnSpc>
               <a:buNone/>
             </a:pPr>
             <a:r>
               <a:rPr lang="en-US" sz="1350" dirty="0">
                 <a:solidFill>
-                  <a:srgbClr val="E5D8BC"/>
+                  <a:srgbClr val="231D13"/>
                 </a:solidFill>
                 <a:latin typeface="Calibri" pitchFamily="34" charset="0"/>
                 <a:ea typeface="Calibri" pitchFamily="34" charset="-122"/>
@@ -3322,6 +3322,26 @@
             <a:endParaRPr lang="en-US" sz="1350" dirty="0"/>
           </a:p>
         </p:txBody>
+      </p:sp>
+      <p:sp>
+        <p:nvSpPr>
+          <p:cNvPr id="9" name="Shape 7"/>
+          <p:cNvSpPr/>
+          <p:nvPr/>
+        </p:nvSpPr>
+        <p:spPr>
+          <a:xfrm>
+            <a:off x="5669280" y="3703320"/>
+            <a:ext cx="841248" cy="512064"/>
+          </a:xfrm>
+          <a:prstGeom prst="rightArrow">
+            <a:avLst/>
+          </a:prstGeom>
+          <a:solidFill>
+            <a:srgbClr val="5A4420"/>
+          </a:solidFill>
+          <a:ln/>
+        </p:spPr>
       </p:sp>
     </p:spTree>
   </p:cSld>

--- a/ppt/JaipalKasireddy_X25156381_smart-mining-safety.pptx
+++ b/ppt/JaipalKasireddy_X25156381_smart-mining-safety.pptx
@@ -1578,12 +1578,12 @@
         </p:nvSpPr>
         <p:spPr>
           <a:xfrm>
-            <a:off x="640080" y="1554480"/>
-            <a:ext cx="3200400" cy="3383280"/>
+            <a:off x="640080" y="2468880"/>
+            <a:ext cx="1572768" cy="1371600"/>
           </a:xfrm>
           <a:prstGeom prst="roundRect">
             <a:avLst>
-              <a:gd name="adj" fmla="val 2857"/>
+              <a:gd name="adj" fmla="val 6667"/>
             </a:avLst>
           </a:prstGeom>
           <a:solidFill>
@@ -1599,63 +1599,146 @@
       </p:sp>
       <p:sp>
         <p:nvSpPr>
-          <p:cNvPr id="4" name="Text 2"/>
-          <p:cNvSpPr/>
-          <p:nvPr/>
-        </p:nvSpPr>
-        <p:spPr>
-          <a:xfrm>
-            <a:off x="640080" y="1691640"/>
-            <a:ext cx="3200400" cy="365760"/>
-          </a:xfrm>
-          <a:prstGeom prst="rect">
-            <a:avLst/>
-          </a:prstGeom>
-          <a:noFill/>
-          <a:ln/>
-        </p:spPr>
-        <p:txBody>
-          <a:bodyPr wrap="square" rtlCol="0" anchor="ctr"/>
+          <p:cNvPr id="4" name="Shape 2"/>
+          <p:cNvSpPr/>
+          <p:nvPr/>
+        </p:nvSpPr>
+        <p:spPr>
+          <a:xfrm>
+            <a:off x="1335024" y="2633472"/>
+            <a:ext cx="182880" cy="182880"/>
+          </a:xfrm>
+          <a:prstGeom prst="ellipse">
+            <a:avLst/>
+          </a:prstGeom>
+          <a:solidFill>
+            <a:srgbClr val="9A8248"/>
+          </a:solidFill>
+          <a:ln/>
+        </p:spPr>
+      </p:sp>
+      <p:sp>
+        <p:nvSpPr>
+          <p:cNvPr id="5" name="Text 3"/>
+          <p:cNvSpPr/>
+          <p:nvPr/>
+        </p:nvSpPr>
+        <p:spPr>
+          <a:xfrm>
+            <a:off x="612648" y="2852928"/>
+            <a:ext cx="1627632" cy="365760"/>
+          </a:xfrm>
+          <a:prstGeom prst="rect">
+            <a:avLst/>
+          </a:prstGeom>
+          <a:noFill/>
+          <a:ln/>
+        </p:spPr>
+        <p:txBody>
+          <a:bodyPr wrap="square" lIns="0" tIns="0" rIns="0" bIns="0" rtlCol="0" anchor="ctr"/>
           <a:lstStyle/>
           <a:p>
             <a:pPr algn="ctr" indent="0" marL="0">
               <a:buNone/>
             </a:pPr>
             <a:r>
-              <a:rPr lang="en-US" sz="1200" b="1" spc="300" kern="0" dirty="0">
-                <a:solidFill>
-                  <a:srgbClr val="9A8248"/>
+              <a:rPr lang="en-US" sz="1450" b="1" dirty="0">
+                <a:solidFill>
+                  <a:srgbClr val="231D13"/>
                 </a:solidFill>
                 <a:latin typeface="Calibri" pitchFamily="34" charset="0"/>
                 <a:ea typeface="Calibri" pitchFamily="34" charset="-122"/>
                 <a:cs typeface="Calibri" pitchFamily="34" charset="-120"/>
               </a:rPr>
-              <a:t>EDGE</a:t>
-            </a:r>
-            <a:endParaRPr lang="en-US" sz="1200" dirty="0"/>
-          </a:p>
-        </p:txBody>
-      </p:sp>
-      <p:sp>
-        <p:nvSpPr>
-          <p:cNvPr id="5" name="Shape 3"/>
-          <p:cNvSpPr/>
-          <p:nvPr/>
-        </p:nvSpPr>
-        <p:spPr>
-          <a:xfrm>
-            <a:off x="914400" y="2286000"/>
-            <a:ext cx="2651760" cy="1005840"/>
+              <a:t>Shaft sensors</a:t>
+            </a:r>
+            <a:endParaRPr lang="en-US" sz="1450" dirty="0"/>
+          </a:p>
+        </p:txBody>
+      </p:sp>
+      <p:sp>
+        <p:nvSpPr>
+          <p:cNvPr id="6" name="Text 4"/>
+          <p:cNvSpPr/>
+          <p:nvPr/>
+        </p:nvSpPr>
+        <p:spPr>
+          <a:xfrm>
+            <a:off x="640080" y="3200400"/>
+            <a:ext cx="1572768" cy="411480"/>
+          </a:xfrm>
+          <a:prstGeom prst="rect">
+            <a:avLst/>
+          </a:prstGeom>
+          <a:noFill/>
+          <a:ln/>
+        </p:spPr>
+        <p:txBody>
+          <a:bodyPr wrap="square" lIns="0" tIns="0" rIns="0" bIns="0" rtlCol="0" anchor="t"/>
+          <a:lstStyle/>
+          <a:p>
+            <a:pPr algn="ctr" indent="0" marL="0">
+              <a:buNone/>
+            </a:pPr>
+            <a:r>
+              <a:rPr lang="en-US" sz="1050" dirty="0">
+                <a:solidFill>
+                  <a:srgbClr val="6E6248"/>
+                </a:solidFill>
+                <a:latin typeface="Calibri" pitchFamily="34" charset="0"/>
+                <a:ea typeface="Calibri" pitchFamily="34" charset="-122"/>
+                <a:cs typeface="Calibri" pitchFamily="34" charset="-120"/>
+              </a:rPr>
+              <a:t>10 · 2 shafts · 5 hazards</a:t>
+            </a:r>
+            <a:endParaRPr lang="en-US" sz="1050" dirty="0"/>
+          </a:p>
+        </p:txBody>
+      </p:sp>
+      <p:sp>
+        <p:nvSpPr>
+          <p:cNvPr id="7" name="Shape 5"/>
+          <p:cNvSpPr/>
+          <p:nvPr/>
+        </p:nvSpPr>
+        <p:spPr>
+          <a:xfrm>
+            <a:off x="2231136" y="3154680"/>
+            <a:ext cx="258409" cy="0"/>
+          </a:xfrm>
+          <a:prstGeom prst="line">
+            <a:avLst/>
+          </a:prstGeom>
+          <a:noFill/>
+          <a:ln w="25400">
+            <a:solidFill>
+              <a:srgbClr val="9A8248"/>
+            </a:solidFill>
+            <a:prstDash val="solid"/>
+            <a:tailEnd type="triangle"/>
+          </a:ln>
+        </p:spPr>
+      </p:sp>
+      <p:sp>
+        <p:nvSpPr>
+          <p:cNvPr id="8" name="Shape 6"/>
+          <p:cNvSpPr/>
+          <p:nvPr/>
+        </p:nvSpPr>
+        <p:spPr>
+          <a:xfrm>
+            <a:off x="2507833" y="2468880"/>
+            <a:ext cx="1572768" cy="1371600"/>
           </a:xfrm>
           <a:prstGeom prst="roundRect">
             <a:avLst>
-              <a:gd name="adj" fmla="val 7273"/>
+              <a:gd name="adj" fmla="val 6667"/>
             </a:avLst>
           </a:prstGeom>
           <a:solidFill>
-            <a:srgbClr val="FFFFFF"/>
+            <a:srgbClr val="F4EFE4"/>
           </a:solidFill>
-          <a:ln w="15240">
+          <a:ln w="19050">
             <a:solidFill>
               <a:srgbClr val="9A8248"/>
             </a:solidFill>
@@ -1665,14 +1748,34 @@
       </p:sp>
       <p:sp>
         <p:nvSpPr>
-          <p:cNvPr id="6" name="Text 4"/>
-          <p:cNvSpPr/>
-          <p:nvPr/>
-        </p:nvSpPr>
-        <p:spPr>
-          <a:xfrm>
-            <a:off x="914400" y="2432304"/>
-            <a:ext cx="2651760" cy="365760"/>
+          <p:cNvPr id="9" name="Shape 7"/>
+          <p:cNvSpPr/>
+          <p:nvPr/>
+        </p:nvSpPr>
+        <p:spPr>
+          <a:xfrm>
+            <a:off x="3202777" y="2633472"/>
+            <a:ext cx="182880" cy="182880"/>
+          </a:xfrm>
+          <a:prstGeom prst="ellipse">
+            <a:avLst/>
+          </a:prstGeom>
+          <a:solidFill>
+            <a:srgbClr val="9A8248"/>
+          </a:solidFill>
+          <a:ln/>
+        </p:spPr>
+      </p:sp>
+      <p:sp>
+        <p:nvSpPr>
+          <p:cNvPr id="10" name="Text 8"/>
+          <p:cNvSpPr/>
+          <p:nvPr/>
+        </p:nvSpPr>
+        <p:spPr>
+          <a:xfrm>
+            <a:off x="2480401" y="2852928"/>
+            <a:ext cx="1627632" cy="365760"/>
           </a:xfrm>
           <a:prstGeom prst="rect">
             <a:avLst/>
@@ -1688,7 +1791,7 @@
               <a:buNone/>
             </a:pPr>
             <a:r>
-              <a:rPr lang="en-US" sz="1400" b="1" dirty="0">
+              <a:rPr lang="en-US" sz="1450" b="1" dirty="0">
                 <a:solidFill>
                   <a:srgbClr val="231D13"/>
                 </a:solidFill>
@@ -1696,38 +1799,38 @@
                 <a:ea typeface="Calibri" pitchFamily="34" charset="-122"/>
                 <a:cs typeface="Calibri" pitchFamily="34" charset="-120"/>
               </a:rPr>
-              <a:t>Shaft sensors</a:t>
-            </a:r>
-            <a:endParaRPr lang="en-US" sz="1400" dirty="0"/>
-          </a:p>
-        </p:txBody>
-      </p:sp>
-      <p:sp>
-        <p:nvSpPr>
-          <p:cNvPr id="7" name="Text 5"/>
-          <p:cNvSpPr/>
-          <p:nvPr/>
-        </p:nvSpPr>
-        <p:spPr>
-          <a:xfrm>
-            <a:off x="914400" y="2816352"/>
-            <a:ext cx="2651760" cy="365760"/>
-          </a:xfrm>
-          <a:prstGeom prst="rect">
-            <a:avLst/>
-          </a:prstGeom>
-          <a:noFill/>
-          <a:ln/>
-        </p:spPr>
-        <p:txBody>
-          <a:bodyPr wrap="square" lIns="0" tIns="0" rIns="0" bIns="0" rtlCol="0" anchor="ctr"/>
+              <a:t>Fog node</a:t>
+            </a:r>
+            <a:endParaRPr lang="en-US" sz="1450" dirty="0"/>
+          </a:p>
+        </p:txBody>
+      </p:sp>
+      <p:sp>
+        <p:nvSpPr>
+          <p:cNvPr id="11" name="Text 9"/>
+          <p:cNvSpPr/>
+          <p:nvPr/>
+        </p:nvSpPr>
+        <p:spPr>
+          <a:xfrm>
+            <a:off x="2507833" y="3200400"/>
+            <a:ext cx="1572768" cy="411480"/>
+          </a:xfrm>
+          <a:prstGeom prst="rect">
+            <a:avLst/>
+          </a:prstGeom>
+          <a:noFill/>
+          <a:ln/>
+        </p:spPr>
+        <p:txBody>
+          <a:bodyPr wrap="square" lIns="0" tIns="0" rIns="0" bIns="0" rtlCol="0" anchor="t"/>
           <a:lstStyle/>
           <a:p>
             <a:pPr algn="ctr" indent="0" marL="0">
               <a:buNone/>
             </a:pPr>
             <a:r>
-              <a:rPr lang="en-US" sz="1000" dirty="0">
+              <a:rPr lang="en-US" sz="1050" dirty="0">
                 <a:solidFill>
                   <a:srgbClr val="6E6248"/>
                 </a:solidFill>
@@ -1735,155 +1838,50 @@
                 <a:ea typeface="Calibri" pitchFamily="34" charset="-122"/>
                 <a:cs typeface="Calibri" pitchFamily="34" charset="-120"/>
               </a:rPr>
-              <a:t>10 · 2 shafts · 5 hazards</a:t>
-            </a:r>
-            <a:endParaRPr lang="en-US" sz="1000" dirty="0"/>
-          </a:p>
-        </p:txBody>
-      </p:sp>
-      <p:sp>
-        <p:nvSpPr>
-          <p:cNvPr id="8" name="Shape 6"/>
-          <p:cNvSpPr/>
-          <p:nvPr/>
-        </p:nvSpPr>
-        <p:spPr>
-          <a:xfrm>
-            <a:off x="914400" y="3520440"/>
-            <a:ext cx="2651760" cy="1005840"/>
-          </a:xfrm>
-          <a:prstGeom prst="roundRect">
-            <a:avLst>
-              <a:gd name="adj" fmla="val 7273"/>
-            </a:avLst>
-          </a:prstGeom>
-          <a:solidFill>
-            <a:srgbClr val="FFFFFF"/>
-          </a:solidFill>
-          <a:ln w="15240">
+              <a:t>windows · thresholds</a:t>
+            </a:r>
+            <a:endParaRPr lang="en-US" sz="1050" dirty="0"/>
+          </a:p>
+        </p:txBody>
+      </p:sp>
+      <p:sp>
+        <p:nvSpPr>
+          <p:cNvPr id="12" name="Shape 10"/>
+          <p:cNvSpPr/>
+          <p:nvPr/>
+        </p:nvSpPr>
+        <p:spPr>
+          <a:xfrm>
+            <a:off x="4098889" y="3154680"/>
+            <a:ext cx="258409" cy="0"/>
+          </a:xfrm>
+          <a:prstGeom prst="line">
+            <a:avLst/>
+          </a:prstGeom>
+          <a:noFill/>
+          <a:ln w="25400">
             <a:solidFill>
               <a:srgbClr val="9A8248"/>
             </a:solidFill>
             <a:prstDash val="solid"/>
-          </a:ln>
-        </p:spPr>
-      </p:sp>
-      <p:sp>
-        <p:nvSpPr>
-          <p:cNvPr id="9" name="Text 7"/>
-          <p:cNvSpPr/>
-          <p:nvPr/>
-        </p:nvSpPr>
-        <p:spPr>
-          <a:xfrm>
-            <a:off x="914400" y="3666744"/>
-            <a:ext cx="2651760" cy="365760"/>
-          </a:xfrm>
-          <a:prstGeom prst="rect">
-            <a:avLst/>
-          </a:prstGeom>
-          <a:noFill/>
-          <a:ln/>
-        </p:spPr>
-        <p:txBody>
-          <a:bodyPr wrap="square" lIns="0" tIns="0" rIns="0" bIns="0" rtlCol="0" anchor="ctr"/>
-          <a:lstStyle/>
-          <a:p>
-            <a:pPr algn="ctr" indent="0" marL="0">
-              <a:buNone/>
-            </a:pPr>
-            <a:r>
-              <a:rPr lang="en-US" sz="1400" b="1" dirty="0">
-                <a:solidFill>
-                  <a:srgbClr val="231D13"/>
-                </a:solidFill>
-                <a:latin typeface="Calibri" pitchFamily="34" charset="0"/>
-                <a:ea typeface="Calibri" pitchFamily="34" charset="-122"/>
-                <a:cs typeface="Calibri" pitchFamily="34" charset="-120"/>
-              </a:rPr>
-              <a:t>Fog node</a:t>
-            </a:r>
-            <a:endParaRPr lang="en-US" sz="1400" dirty="0"/>
-          </a:p>
-        </p:txBody>
-      </p:sp>
-      <p:sp>
-        <p:nvSpPr>
-          <p:cNvPr id="10" name="Text 8"/>
-          <p:cNvSpPr/>
-          <p:nvPr/>
-        </p:nvSpPr>
-        <p:spPr>
-          <a:xfrm>
-            <a:off x="914400" y="4050792"/>
-            <a:ext cx="2651760" cy="365760"/>
-          </a:xfrm>
-          <a:prstGeom prst="rect">
-            <a:avLst/>
-          </a:prstGeom>
-          <a:noFill/>
-          <a:ln/>
-        </p:spPr>
-        <p:txBody>
-          <a:bodyPr wrap="square" lIns="0" tIns="0" rIns="0" bIns="0" rtlCol="0" anchor="ctr"/>
-          <a:lstStyle/>
-          <a:p>
-            <a:pPr algn="ctr" indent="0" marL="0">
-              <a:buNone/>
-            </a:pPr>
-            <a:r>
-              <a:rPr lang="en-US" sz="1000" dirty="0">
-                <a:solidFill>
-                  <a:srgbClr val="6E6248"/>
-                </a:solidFill>
-                <a:latin typeface="Calibri" pitchFamily="34" charset="0"/>
-                <a:ea typeface="Calibri" pitchFamily="34" charset="-122"/>
-                <a:cs typeface="Calibri" pitchFamily="34" charset="-120"/>
-              </a:rPr>
-              <a:t>windows · thresholds</a:t>
-            </a:r>
-            <a:endParaRPr lang="en-US" sz="1000" dirty="0"/>
-          </a:p>
-        </p:txBody>
-      </p:sp>
-      <p:sp>
-        <p:nvSpPr>
-          <p:cNvPr id="11" name="Shape 9"/>
-          <p:cNvSpPr/>
-          <p:nvPr/>
-        </p:nvSpPr>
-        <p:spPr>
-          <a:xfrm>
-            <a:off x="3886200" y="3246120"/>
-            <a:ext cx="502920" cy="0"/>
-          </a:xfrm>
-          <a:prstGeom prst="line">
-            <a:avLst/>
-          </a:prstGeom>
-          <a:noFill/>
-          <a:ln w="31750">
-            <a:solidFill>
-              <a:srgbClr val="5A4420"/>
-            </a:solidFill>
-            <a:prstDash val="solid"/>
             <a:tailEnd type="triangle"/>
           </a:ln>
         </p:spPr>
       </p:sp>
       <p:sp>
         <p:nvSpPr>
-          <p:cNvPr id="12" name="Shape 10"/>
-          <p:cNvSpPr/>
-          <p:nvPr/>
-        </p:nvSpPr>
-        <p:spPr>
-          <a:xfrm>
-            <a:off x="4572000" y="1554480"/>
-            <a:ext cx="6949440" cy="3383280"/>
+          <p:cNvPr id="13" name="Shape 11"/>
+          <p:cNvSpPr/>
+          <p:nvPr/>
+        </p:nvSpPr>
+        <p:spPr>
+          <a:xfrm>
+            <a:off x="4375587" y="2468880"/>
+            <a:ext cx="1572768" cy="1371600"/>
           </a:xfrm>
           <a:prstGeom prst="roundRect">
             <a:avLst>
-              <a:gd name="adj" fmla="val 2703"/>
+              <a:gd name="adj" fmla="val 6667"/>
             </a:avLst>
           </a:prstGeom>
           <a:solidFill>
@@ -1899,145 +1897,99 @@
       </p:sp>
       <p:sp>
         <p:nvSpPr>
-          <p:cNvPr id="13" name="Text 11"/>
-          <p:cNvSpPr/>
-          <p:nvPr/>
-        </p:nvSpPr>
-        <p:spPr>
-          <a:xfrm>
-            <a:off x="4572000" y="1691640"/>
-            <a:ext cx="6949440" cy="365760"/>
-          </a:xfrm>
-          <a:prstGeom prst="rect">
-            <a:avLst/>
-          </a:prstGeom>
-          <a:noFill/>
-          <a:ln/>
-        </p:spPr>
-        <p:txBody>
-          <a:bodyPr wrap="square" rtlCol="0" anchor="ctr"/>
+          <p:cNvPr id="14" name="Shape 12"/>
+          <p:cNvSpPr/>
+          <p:nvPr/>
+        </p:nvSpPr>
+        <p:spPr>
+          <a:xfrm>
+            <a:off x="5070531" y="2633472"/>
+            <a:ext cx="182880" cy="182880"/>
+          </a:xfrm>
+          <a:prstGeom prst="ellipse">
+            <a:avLst/>
+          </a:prstGeom>
+          <a:solidFill>
+            <a:srgbClr val="5A4420"/>
+          </a:solidFill>
+          <a:ln/>
+        </p:spPr>
+      </p:sp>
+      <p:sp>
+        <p:nvSpPr>
+          <p:cNvPr id="15" name="Text 13"/>
+          <p:cNvSpPr/>
+          <p:nvPr/>
+        </p:nvSpPr>
+        <p:spPr>
+          <a:xfrm>
+            <a:off x="4348155" y="2852928"/>
+            <a:ext cx="1627632" cy="365760"/>
+          </a:xfrm>
+          <a:prstGeom prst="rect">
+            <a:avLst/>
+          </a:prstGeom>
+          <a:noFill/>
+          <a:ln/>
+        </p:spPr>
+        <p:txBody>
+          <a:bodyPr wrap="square" lIns="0" tIns="0" rIns="0" bIns="0" rtlCol="0" anchor="ctr"/>
           <a:lstStyle/>
           <a:p>
             <a:pPr algn="ctr" indent="0" marL="0">
               <a:buNone/>
             </a:pPr>
             <a:r>
-              <a:rPr lang="en-US" sz="1200" b="1" spc="200" kern="0" dirty="0">
-                <a:solidFill>
-                  <a:srgbClr val="5A4420"/>
+              <a:rPr lang="en-US" sz="1450" b="1" dirty="0">
+                <a:solidFill>
+                  <a:srgbClr val="231D13"/>
                 </a:solidFill>
                 <a:latin typeface="Calibri" pitchFamily="34" charset="0"/>
                 <a:ea typeface="Calibri" pitchFamily="34" charset="-122"/>
                 <a:cs typeface="Calibri" pitchFamily="34" charset="-120"/>
               </a:rPr>
-              <a:t>CLOUD (serverless)</a:t>
-            </a:r>
-            <a:endParaRPr lang="en-US" sz="1200" dirty="0"/>
-          </a:p>
-        </p:txBody>
-      </p:sp>
-      <p:sp>
-        <p:nvSpPr>
-          <p:cNvPr id="14" name="Shape 12"/>
-          <p:cNvSpPr/>
-          <p:nvPr/>
-        </p:nvSpPr>
-        <p:spPr>
-          <a:xfrm>
-            <a:off x="4846320" y="2651760"/>
-            <a:ext cx="1463040" cy="1371600"/>
-          </a:xfrm>
-          <a:prstGeom prst="roundRect">
-            <a:avLst>
-              <a:gd name="adj" fmla="val 5333"/>
-            </a:avLst>
-          </a:prstGeom>
-          <a:solidFill>
-            <a:srgbClr val="FFFFFF"/>
-          </a:solidFill>
-          <a:ln w="15240">
-            <a:solidFill>
-              <a:srgbClr val="5A4420"/>
-            </a:solidFill>
-            <a:prstDash val="solid"/>
-          </a:ln>
-        </p:spPr>
-      </p:sp>
-      <p:sp>
-        <p:nvSpPr>
-          <p:cNvPr id="15" name="Text 13"/>
-          <p:cNvSpPr/>
-          <p:nvPr/>
-        </p:nvSpPr>
-        <p:spPr>
-          <a:xfrm>
-            <a:off x="4800600" y="2907792"/>
-            <a:ext cx="1554480" cy="457200"/>
-          </a:xfrm>
-          <a:prstGeom prst="rect">
-            <a:avLst/>
-          </a:prstGeom>
-          <a:noFill/>
-          <a:ln/>
-        </p:spPr>
-        <p:txBody>
-          <a:bodyPr wrap="square" lIns="0" tIns="0" rIns="0" bIns="0" rtlCol="0" anchor="ctr"/>
+              <a:t>Amazon SQS</a:t>
+            </a:r>
+            <a:endParaRPr lang="en-US" sz="1450" dirty="0"/>
+          </a:p>
+        </p:txBody>
+      </p:sp>
+      <p:sp>
+        <p:nvSpPr>
+          <p:cNvPr id="16" name="Text 14"/>
+          <p:cNvSpPr/>
+          <p:nvPr/>
+        </p:nvSpPr>
+        <p:spPr>
+          <a:xfrm>
+            <a:off x="4375587" y="3200400"/>
+            <a:ext cx="1572768" cy="411480"/>
+          </a:xfrm>
+          <a:prstGeom prst="rect">
+            <a:avLst/>
+          </a:prstGeom>
+          <a:noFill/>
+          <a:ln/>
+        </p:spPr>
+        <p:txBody>
+          <a:bodyPr wrap="square" lIns="0" tIns="0" rIns="0" bIns="0" rtlCol="0" anchor="t"/>
           <a:lstStyle/>
           <a:p>
             <a:pPr algn="ctr" indent="0" marL="0">
               <a:buNone/>
             </a:pPr>
             <a:r>
-              <a:rPr lang="en-US" sz="1250" b="1" dirty="0">
-                <a:solidFill>
-                  <a:srgbClr val="231D13"/>
+              <a:rPr lang="en-US" sz="1050" dirty="0">
+                <a:solidFill>
+                  <a:srgbClr val="6E6248"/>
                 </a:solidFill>
                 <a:latin typeface="Calibri" pitchFamily="34" charset="0"/>
                 <a:ea typeface="Calibri" pitchFamily="34" charset="-122"/>
                 <a:cs typeface="Calibri" pitchFamily="34" charset="-120"/>
               </a:rPr>
-              <a:t>Amazon SQS</a:t>
-            </a:r>
-            <a:endParaRPr lang="en-US" sz="1250" dirty="0"/>
-          </a:p>
-        </p:txBody>
-      </p:sp>
-      <p:sp>
-        <p:nvSpPr>
-          <p:cNvPr id="16" name="Text 14"/>
-          <p:cNvSpPr/>
-          <p:nvPr/>
-        </p:nvSpPr>
-        <p:spPr>
-          <a:xfrm>
-            <a:off x="4828032" y="3401568"/>
-            <a:ext cx="1499616" cy="457200"/>
-          </a:xfrm>
-          <a:prstGeom prst="rect">
-            <a:avLst/>
-          </a:prstGeom>
-          <a:noFill/>
-          <a:ln/>
-        </p:spPr>
-        <p:txBody>
-          <a:bodyPr wrap="square" lIns="0" tIns="0" rIns="0" bIns="0" rtlCol="0" anchor="ctr"/>
-          <a:lstStyle/>
-          <a:p>
-            <a:pPr algn="ctr" indent="0" marL="0">
-              <a:buNone/>
-            </a:pPr>
-            <a:r>
-              <a:rPr lang="en-US" sz="900" dirty="0">
-                <a:solidFill>
-                  <a:srgbClr val="6E6248"/>
-                </a:solidFill>
-                <a:latin typeface="Calibri" pitchFamily="34" charset="0"/>
-                <a:ea typeface="Calibri" pitchFamily="34" charset="-122"/>
-                <a:cs typeface="Calibri" pitchFamily="34" charset="-120"/>
-              </a:rPr>
               <a:t>batches ≤10</a:t>
             </a:r>
-            <a:endParaRPr lang="en-US" sz="900" dirty="0"/>
+            <a:endParaRPr lang="en-US" sz="1050" dirty="0"/>
           </a:p>
         </p:txBody>
       </p:sp>
@@ -2049,14 +2001,14 @@
         </p:nvSpPr>
         <p:spPr>
           <a:xfrm>
-            <a:off x="6318504" y="3337560"/>
-            <a:ext cx="164592" cy="0"/>
+            <a:off x="5966643" y="3154680"/>
+            <a:ext cx="258409" cy="0"/>
           </a:xfrm>
           <a:prstGeom prst="line">
             <a:avLst/>
           </a:prstGeom>
           <a:noFill/>
-          <a:ln w="20320">
+          <a:ln w="25400">
             <a:solidFill>
               <a:srgbClr val="9A8248"/>
             </a:solidFill>
@@ -2073,18 +2025,18 @@
         </p:nvSpPr>
         <p:spPr>
           <a:xfrm>
-            <a:off x="6492240" y="2651760"/>
-            <a:ext cx="1463040" cy="1371600"/>
+            <a:off x="6243340" y="2468880"/>
+            <a:ext cx="1572768" cy="1371600"/>
           </a:xfrm>
           <a:prstGeom prst="roundRect">
             <a:avLst>
-              <a:gd name="adj" fmla="val 5333"/>
+              <a:gd name="adj" fmla="val 6667"/>
             </a:avLst>
           </a:prstGeom>
           <a:solidFill>
-            <a:srgbClr val="FFFFFF"/>
+            <a:srgbClr val="F4EFE4"/>
           </a:solidFill>
-          <a:ln w="15240">
+          <a:ln w="19050">
             <a:solidFill>
               <a:srgbClr val="5A4420"/>
             </a:solidFill>
@@ -2094,14 +2046,34 @@
       </p:sp>
       <p:sp>
         <p:nvSpPr>
-          <p:cNvPr id="19" name="Text 17"/>
-          <p:cNvSpPr/>
-          <p:nvPr/>
-        </p:nvSpPr>
-        <p:spPr>
-          <a:xfrm>
-            <a:off x="6446520" y="2907792"/>
-            <a:ext cx="1554480" cy="457200"/>
+          <p:cNvPr id="19" name="Shape 17"/>
+          <p:cNvSpPr/>
+          <p:nvPr/>
+        </p:nvSpPr>
+        <p:spPr>
+          <a:xfrm>
+            <a:off x="6938284" y="2633472"/>
+            <a:ext cx="182880" cy="182880"/>
+          </a:xfrm>
+          <a:prstGeom prst="ellipse">
+            <a:avLst/>
+          </a:prstGeom>
+          <a:solidFill>
+            <a:srgbClr val="5A4420"/>
+          </a:solidFill>
+          <a:ln/>
+        </p:spPr>
+      </p:sp>
+      <p:sp>
+        <p:nvSpPr>
+          <p:cNvPr id="20" name="Text 18"/>
+          <p:cNvSpPr/>
+          <p:nvPr/>
+        </p:nvSpPr>
+        <p:spPr>
+          <a:xfrm>
+            <a:off x="6215908" y="2852928"/>
+            <a:ext cx="1627632" cy="365760"/>
           </a:xfrm>
           <a:prstGeom prst="rect">
             <a:avLst/>
@@ -2117,7 +2089,7 @@
               <a:buNone/>
             </a:pPr>
             <a:r>
-              <a:rPr lang="en-US" sz="1250" b="1" dirty="0">
+              <a:rPr lang="en-US" sz="1450" b="1" dirty="0">
                 <a:solidFill>
                   <a:srgbClr val="231D13"/>
                 </a:solidFill>
@@ -2127,36 +2099,36 @@
               </a:rPr>
               <a:t>AWS Lambda</a:t>
             </a:r>
-            <a:endParaRPr lang="en-US" sz="1250" dirty="0"/>
-          </a:p>
-        </p:txBody>
-      </p:sp>
-      <p:sp>
-        <p:nvSpPr>
-          <p:cNvPr id="20" name="Text 18"/>
-          <p:cNvSpPr/>
-          <p:nvPr/>
-        </p:nvSpPr>
-        <p:spPr>
-          <a:xfrm>
-            <a:off x="6473952" y="3401568"/>
-            <a:ext cx="1499616" cy="457200"/>
-          </a:xfrm>
-          <a:prstGeom prst="rect">
-            <a:avLst/>
-          </a:prstGeom>
-          <a:noFill/>
-          <a:ln/>
-        </p:spPr>
-        <p:txBody>
-          <a:bodyPr wrap="square" lIns="0" tIns="0" rIns="0" bIns="0" rtlCol="0" anchor="ctr"/>
+            <a:endParaRPr lang="en-US" sz="1450" dirty="0"/>
+          </a:p>
+        </p:txBody>
+      </p:sp>
+      <p:sp>
+        <p:nvSpPr>
+          <p:cNvPr id="21" name="Text 19"/>
+          <p:cNvSpPr/>
+          <p:nvPr/>
+        </p:nvSpPr>
+        <p:spPr>
+          <a:xfrm>
+            <a:off x="6243340" y="3200400"/>
+            <a:ext cx="1572768" cy="411480"/>
+          </a:xfrm>
+          <a:prstGeom prst="rect">
+            <a:avLst/>
+          </a:prstGeom>
+          <a:noFill/>
+          <a:ln/>
+        </p:spPr>
+        <p:txBody>
+          <a:bodyPr wrap="square" lIns="0" tIns="0" rIns="0" bIns="0" rtlCol="0" anchor="t"/>
           <a:lstStyle/>
           <a:p>
             <a:pPr algn="ctr" indent="0" marL="0">
               <a:buNone/>
             </a:pPr>
             <a:r>
-              <a:rPr lang="en-US" sz="900" dirty="0">
+              <a:rPr lang="en-US" sz="1050" dirty="0">
                 <a:solidFill>
                   <a:srgbClr val="6E6248"/>
                 </a:solidFill>
@@ -2166,26 +2138,26 @@
               </a:rPr>
               <a:t>java17 ingest</a:t>
             </a:r>
-            <a:endParaRPr lang="en-US" sz="900" dirty="0"/>
-          </a:p>
-        </p:txBody>
-      </p:sp>
-      <p:sp>
-        <p:nvSpPr>
-          <p:cNvPr id="21" name="Shape 19"/>
-          <p:cNvSpPr/>
-          <p:nvPr/>
-        </p:nvSpPr>
-        <p:spPr>
-          <a:xfrm>
-            <a:off x="7964424" y="3337560"/>
-            <a:ext cx="164592" cy="0"/>
+            <a:endParaRPr lang="en-US" sz="1050" dirty="0"/>
+          </a:p>
+        </p:txBody>
+      </p:sp>
+      <p:sp>
+        <p:nvSpPr>
+          <p:cNvPr id="22" name="Shape 20"/>
+          <p:cNvSpPr/>
+          <p:nvPr/>
+        </p:nvSpPr>
+        <p:spPr>
+          <a:xfrm>
+            <a:off x="7834396" y="3154680"/>
+            <a:ext cx="258409" cy="0"/>
           </a:xfrm>
           <a:prstGeom prst="line">
             <a:avLst/>
           </a:prstGeom>
           <a:noFill/>
-          <a:ln w="20320">
+          <a:ln w="25400">
             <a:solidFill>
               <a:srgbClr val="9A8248"/>
             </a:solidFill>
@@ -2196,24 +2168,24 @@
       </p:sp>
       <p:sp>
         <p:nvSpPr>
-          <p:cNvPr id="22" name="Shape 20"/>
-          <p:cNvSpPr/>
-          <p:nvPr/>
-        </p:nvSpPr>
-        <p:spPr>
-          <a:xfrm>
-            <a:off x="8138160" y="2651760"/>
-            <a:ext cx="1463040" cy="1371600"/>
+          <p:cNvPr id="23" name="Shape 21"/>
+          <p:cNvSpPr/>
+          <p:nvPr/>
+        </p:nvSpPr>
+        <p:spPr>
+          <a:xfrm>
+            <a:off x="8111094" y="2468880"/>
+            <a:ext cx="1572768" cy="1371600"/>
           </a:xfrm>
           <a:prstGeom prst="roundRect">
             <a:avLst>
-              <a:gd name="adj" fmla="val 5333"/>
+              <a:gd name="adj" fmla="val 6667"/>
             </a:avLst>
           </a:prstGeom>
           <a:solidFill>
-            <a:srgbClr val="FFFFFF"/>
+            <a:srgbClr val="F4EFE4"/>
           </a:solidFill>
-          <a:ln w="15240">
+          <a:ln w="19050">
             <a:solidFill>
               <a:srgbClr val="5A4420"/>
             </a:solidFill>
@@ -2223,14 +2195,34 @@
       </p:sp>
       <p:sp>
         <p:nvSpPr>
-          <p:cNvPr id="23" name="Text 21"/>
-          <p:cNvSpPr/>
-          <p:nvPr/>
-        </p:nvSpPr>
-        <p:spPr>
-          <a:xfrm>
-            <a:off x="8092440" y="2907792"/>
-            <a:ext cx="1554480" cy="457200"/>
+          <p:cNvPr id="24" name="Shape 22"/>
+          <p:cNvSpPr/>
+          <p:nvPr/>
+        </p:nvSpPr>
+        <p:spPr>
+          <a:xfrm>
+            <a:off x="8806038" y="2633472"/>
+            <a:ext cx="182880" cy="182880"/>
+          </a:xfrm>
+          <a:prstGeom prst="ellipse">
+            <a:avLst/>
+          </a:prstGeom>
+          <a:solidFill>
+            <a:srgbClr val="5A4420"/>
+          </a:solidFill>
+          <a:ln/>
+        </p:spPr>
+      </p:sp>
+      <p:sp>
+        <p:nvSpPr>
+          <p:cNvPr id="25" name="Text 23"/>
+          <p:cNvSpPr/>
+          <p:nvPr/>
+        </p:nvSpPr>
+        <p:spPr>
+          <a:xfrm>
+            <a:off x="8083662" y="2852928"/>
+            <a:ext cx="1627632" cy="365760"/>
           </a:xfrm>
           <a:prstGeom prst="rect">
             <a:avLst/>
@@ -2246,7 +2238,7 @@
               <a:buNone/>
             </a:pPr>
             <a:r>
-              <a:rPr lang="en-US" sz="1250" b="1" dirty="0">
+              <a:rPr lang="en-US" sz="1450" b="1" dirty="0">
                 <a:solidFill>
                   <a:srgbClr val="231D13"/>
                 </a:solidFill>
@@ -2256,36 +2248,36 @@
               </a:rPr>
               <a:t>DynamoDB</a:t>
             </a:r>
-            <a:endParaRPr lang="en-US" sz="1250" dirty="0"/>
-          </a:p>
-        </p:txBody>
-      </p:sp>
-      <p:sp>
-        <p:nvSpPr>
-          <p:cNvPr id="24" name="Text 22"/>
-          <p:cNvSpPr/>
-          <p:nvPr/>
-        </p:nvSpPr>
-        <p:spPr>
-          <a:xfrm>
-            <a:off x="8119872" y="3401568"/>
-            <a:ext cx="1499616" cy="457200"/>
-          </a:xfrm>
-          <a:prstGeom prst="rect">
-            <a:avLst/>
-          </a:prstGeom>
-          <a:noFill/>
-          <a:ln/>
-        </p:spPr>
-        <p:txBody>
-          <a:bodyPr wrap="square" lIns="0" tIns="0" rIns="0" bIns="0" rtlCol="0" anchor="ctr"/>
+            <a:endParaRPr lang="en-US" sz="1450" dirty="0"/>
+          </a:p>
+        </p:txBody>
+      </p:sp>
+      <p:sp>
+        <p:nvSpPr>
+          <p:cNvPr id="26" name="Text 24"/>
+          <p:cNvSpPr/>
+          <p:nvPr/>
+        </p:nvSpPr>
+        <p:spPr>
+          <a:xfrm>
+            <a:off x="8111094" y="3200400"/>
+            <a:ext cx="1572768" cy="411480"/>
+          </a:xfrm>
+          <a:prstGeom prst="rect">
+            <a:avLst/>
+          </a:prstGeom>
+          <a:noFill/>
+          <a:ln/>
+        </p:spPr>
+        <p:txBody>
+          <a:bodyPr wrap="square" lIns="0" tIns="0" rIns="0" bIns="0" rtlCol="0" anchor="t"/>
           <a:lstStyle/>
           <a:p>
             <a:pPr algn="ctr" indent="0" marL="0">
               <a:buNone/>
             </a:pPr>
             <a:r>
-              <a:rPr lang="en-US" sz="900" dirty="0">
+              <a:rPr lang="en-US" sz="1050" dirty="0">
                 <a:solidFill>
                   <a:srgbClr val="6E6248"/>
                 </a:solidFill>
@@ -2295,26 +2287,26 @@
               </a:rPr>
               <a:t>by type · shaft</a:t>
             </a:r>
-            <a:endParaRPr lang="en-US" sz="900" dirty="0"/>
-          </a:p>
-        </p:txBody>
-      </p:sp>
-      <p:sp>
-        <p:nvSpPr>
-          <p:cNvPr id="25" name="Shape 23"/>
-          <p:cNvSpPr/>
-          <p:nvPr/>
-        </p:nvSpPr>
-        <p:spPr>
-          <a:xfrm>
-            <a:off x="9610344" y="3337560"/>
-            <a:ext cx="164592" cy="0"/>
+            <a:endParaRPr lang="en-US" sz="1050" dirty="0"/>
+          </a:p>
+        </p:txBody>
+      </p:sp>
+      <p:sp>
+        <p:nvSpPr>
+          <p:cNvPr id="27" name="Shape 25"/>
+          <p:cNvSpPr/>
+          <p:nvPr/>
+        </p:nvSpPr>
+        <p:spPr>
+          <a:xfrm>
+            <a:off x="9702150" y="3154680"/>
+            <a:ext cx="258409" cy="0"/>
           </a:xfrm>
           <a:prstGeom prst="line">
             <a:avLst/>
           </a:prstGeom>
           <a:noFill/>
-          <a:ln w="20320">
+          <a:ln w="25400">
             <a:solidFill>
               <a:srgbClr val="9A8248"/>
             </a:solidFill>
@@ -2325,24 +2317,24 @@
       </p:sp>
       <p:sp>
         <p:nvSpPr>
-          <p:cNvPr id="26" name="Shape 24"/>
-          <p:cNvSpPr/>
-          <p:nvPr/>
-        </p:nvSpPr>
-        <p:spPr>
-          <a:xfrm>
-            <a:off x="9784080" y="2651760"/>
-            <a:ext cx="1463040" cy="1371600"/>
+          <p:cNvPr id="28" name="Shape 26"/>
+          <p:cNvSpPr/>
+          <p:nvPr/>
+        </p:nvSpPr>
+        <p:spPr>
+          <a:xfrm>
+            <a:off x="9978847" y="2468880"/>
+            <a:ext cx="1572768" cy="1371600"/>
           </a:xfrm>
           <a:prstGeom prst="roundRect">
             <a:avLst>
-              <a:gd name="adj" fmla="val 5333"/>
+              <a:gd name="adj" fmla="val 6667"/>
             </a:avLst>
           </a:prstGeom>
           <a:solidFill>
-            <a:srgbClr val="FFFFFF"/>
+            <a:srgbClr val="F4EFE4"/>
           </a:solidFill>
-          <a:ln w="15240">
+          <a:ln w="19050">
             <a:solidFill>
               <a:srgbClr val="7C5F2A"/>
             </a:solidFill>
@@ -2352,14 +2344,34 @@
       </p:sp>
       <p:sp>
         <p:nvSpPr>
-          <p:cNvPr id="27" name="Text 25"/>
-          <p:cNvSpPr/>
-          <p:nvPr/>
-        </p:nvSpPr>
-        <p:spPr>
-          <a:xfrm>
-            <a:off x="9738360" y="2907792"/>
-            <a:ext cx="1554480" cy="457200"/>
+          <p:cNvPr id="29" name="Shape 27"/>
+          <p:cNvSpPr/>
+          <p:nvPr/>
+        </p:nvSpPr>
+        <p:spPr>
+          <a:xfrm>
+            <a:off x="10673791" y="2633472"/>
+            <a:ext cx="182880" cy="182880"/>
+          </a:xfrm>
+          <a:prstGeom prst="ellipse">
+            <a:avLst/>
+          </a:prstGeom>
+          <a:solidFill>
+            <a:srgbClr val="7C5F2A"/>
+          </a:solidFill>
+          <a:ln/>
+        </p:spPr>
+      </p:sp>
+      <p:sp>
+        <p:nvSpPr>
+          <p:cNvPr id="30" name="Text 28"/>
+          <p:cNvSpPr/>
+          <p:nvPr/>
+        </p:nvSpPr>
+        <p:spPr>
+          <a:xfrm>
+            <a:off x="9951415" y="2852928"/>
+            <a:ext cx="1627632" cy="365760"/>
           </a:xfrm>
           <a:prstGeom prst="rect">
             <a:avLst/>
@@ -2375,7 +2387,7 @@
               <a:buNone/>
             </a:pPr>
             <a:r>
-              <a:rPr lang="en-US" sz="1250" b="1" dirty="0">
+              <a:rPr lang="en-US" sz="1450" b="1" dirty="0">
                 <a:solidFill>
                   <a:srgbClr val="231D13"/>
                 </a:solidFill>
@@ -2385,36 +2397,36 @@
               </a:rPr>
               <a:t>API GW + S3</a:t>
             </a:r>
-            <a:endParaRPr lang="en-US" sz="1250" dirty="0"/>
-          </a:p>
-        </p:txBody>
-      </p:sp>
-      <p:sp>
-        <p:nvSpPr>
-          <p:cNvPr id="28" name="Text 26"/>
-          <p:cNvSpPr/>
-          <p:nvPr/>
-        </p:nvSpPr>
-        <p:spPr>
-          <a:xfrm>
-            <a:off x="9765792" y="3401568"/>
-            <a:ext cx="1499616" cy="457200"/>
-          </a:xfrm>
-          <a:prstGeom prst="rect">
-            <a:avLst/>
-          </a:prstGeom>
-          <a:noFill/>
-          <a:ln/>
-        </p:spPr>
-        <p:txBody>
-          <a:bodyPr wrap="square" lIns="0" tIns="0" rIns="0" bIns="0" rtlCol="0" anchor="ctr"/>
+            <a:endParaRPr lang="en-US" sz="1450" dirty="0"/>
+          </a:p>
+        </p:txBody>
+      </p:sp>
+      <p:sp>
+        <p:nvSpPr>
+          <p:cNvPr id="31" name="Text 29"/>
+          <p:cNvSpPr/>
+          <p:nvPr/>
+        </p:nvSpPr>
+        <p:spPr>
+          <a:xfrm>
+            <a:off x="9978847" y="3200400"/>
+            <a:ext cx="1572768" cy="411480"/>
+          </a:xfrm>
+          <a:prstGeom prst="rect">
+            <a:avLst/>
+          </a:prstGeom>
+          <a:noFill/>
+          <a:ln/>
+        </p:spPr>
+        <p:txBody>
+          <a:bodyPr wrap="square" lIns="0" tIns="0" rIns="0" bIns="0" rtlCol="0" anchor="t"/>
           <a:lstStyle/>
           <a:p>
             <a:pPr algn="ctr" indent="0" marL="0">
               <a:buNone/>
             </a:pPr>
             <a:r>
-              <a:rPr lang="en-US" sz="900" dirty="0">
+              <a:rPr lang="en-US" sz="1050" dirty="0">
                 <a:solidFill>
                   <a:srgbClr val="6E6248"/>
                 </a:solidFill>
@@ -2424,13 +2436,91 @@
               </a:rPr>
               <a:t>SAFE/CAUTION/DANGER</a:t>
             </a:r>
-            <a:endParaRPr lang="en-US" sz="900" dirty="0"/>
-          </a:p>
-        </p:txBody>
-      </p:sp>
-      <p:sp>
-        <p:nvSpPr>
-          <p:cNvPr id="29" name="Text 27"/>
+            <a:endParaRPr lang="en-US" sz="1050" dirty="0"/>
+          </a:p>
+        </p:txBody>
+      </p:sp>
+      <p:sp>
+        <p:nvSpPr>
+          <p:cNvPr id="32" name="Text 30"/>
+          <p:cNvSpPr/>
+          <p:nvPr/>
+        </p:nvSpPr>
+        <p:spPr>
+          <a:xfrm>
+            <a:off x="640080" y="3977640"/>
+            <a:ext cx="3440521" cy="274320"/>
+          </a:xfrm>
+          <a:prstGeom prst="rect">
+            <a:avLst/>
+          </a:prstGeom>
+          <a:noFill/>
+          <a:ln/>
+        </p:spPr>
+        <p:txBody>
+          <a:bodyPr wrap="square" rtlCol="0" anchor="ctr"/>
+          <a:lstStyle/>
+          <a:p>
+            <a:pPr algn="ctr" indent="0" marL="0">
+              <a:buNone/>
+            </a:pPr>
+            <a:r>
+              <a:rPr lang="en-US" sz="1100" b="1" spc="200" kern="0" dirty="0">
+                <a:solidFill>
+                  <a:srgbClr val="9A8248"/>
+                </a:solidFill>
+                <a:latin typeface="Calibri" pitchFamily="34" charset="0"/>
+                <a:ea typeface="Calibri" pitchFamily="34" charset="-122"/>
+                <a:cs typeface="Calibri" pitchFamily="34" charset="-120"/>
+              </a:rPr>
+              <a:t>EDGE</a:t>
+            </a:r>
+            <a:endParaRPr lang="en-US" sz="1100" dirty="0"/>
+          </a:p>
+        </p:txBody>
+      </p:sp>
+      <p:sp>
+        <p:nvSpPr>
+          <p:cNvPr id="33" name="Text 31"/>
+          <p:cNvSpPr/>
+          <p:nvPr/>
+        </p:nvSpPr>
+        <p:spPr>
+          <a:xfrm>
+            <a:off x="4375587" y="3977640"/>
+            <a:ext cx="7176028" cy="274320"/>
+          </a:xfrm>
+          <a:prstGeom prst="rect">
+            <a:avLst/>
+          </a:prstGeom>
+          <a:noFill/>
+          <a:ln/>
+        </p:spPr>
+        <p:txBody>
+          <a:bodyPr wrap="square" rtlCol="0" anchor="ctr"/>
+          <a:lstStyle/>
+          <a:p>
+            <a:pPr algn="ctr" indent="0" marL="0">
+              <a:buNone/>
+            </a:pPr>
+            <a:r>
+              <a:rPr lang="en-US" sz="1100" b="1" spc="200" kern="0" dirty="0">
+                <a:solidFill>
+                  <a:srgbClr val="5A4420"/>
+                </a:solidFill>
+                <a:latin typeface="Calibri" pitchFamily="34" charset="0"/>
+                <a:ea typeface="Calibri" pitchFamily="34" charset="-122"/>
+                <a:cs typeface="Calibri" pitchFamily="34" charset="-120"/>
+              </a:rPr>
+              <a:t>CLOUD</a:t>
+            </a:r>
+            <a:endParaRPr lang="en-US" sz="1100" dirty="0"/>
+          </a:p>
+        </p:txBody>
+      </p:sp>
+      <p:sp>
+        <p:nvSpPr>
+          <p:cNvPr id="34" name="Text 32"/>
           <p:cNvSpPr/>
           <p:nvPr/>
         </p:nvSpPr>
@@ -3109,24 +3199,59 @@
       </p:sp>
       <p:sp>
         <p:nvSpPr>
-          <p:cNvPr id="3" name="Shape 1"/>
-          <p:cNvSpPr/>
-          <p:nvPr/>
-        </p:nvSpPr>
-        <p:spPr>
-          <a:xfrm>
-            <a:off x="640080" y="1874520"/>
-            <a:ext cx="4937760" cy="4160520"/>
-          </a:xfrm>
-          <a:prstGeom prst="roundRect">
-            <a:avLst>
-              <a:gd name="adj" fmla="val 2198"/>
-            </a:avLst>
-          </a:prstGeom>
-          <a:solidFill>
-            <a:srgbClr val="F4EFE4"/>
-          </a:solidFill>
-          <a:ln w="19050">
+          <p:cNvPr id="3" name="Text 1"/>
+          <p:cNvSpPr/>
+          <p:nvPr/>
+        </p:nvSpPr>
+        <p:spPr>
+          <a:xfrm>
+            <a:off x="731520" y="1965960"/>
+            <a:ext cx="2377440" cy="548640"/>
+          </a:xfrm>
+          <a:prstGeom prst="rect">
+            <a:avLst/>
+          </a:prstGeom>
+          <a:noFill/>
+          <a:ln/>
+        </p:spPr>
+        <p:txBody>
+          <a:bodyPr wrap="square" lIns="0" tIns="0" rIns="0" bIns="0" rtlCol="0" anchor="ctr"/>
+          <a:lstStyle/>
+          <a:p>
+            <a:pPr indent="0" marL="0">
+              <a:buNone/>
+            </a:pPr>
+            <a:r>
+              <a:rPr lang="en-US" sz="2300" b="1" dirty="0">
+                <a:solidFill>
+                  <a:srgbClr val="D9A62E"/>
+                </a:solidFill>
+                <a:latin typeface="Times New Roman" pitchFamily="34" charset="0"/>
+                <a:ea typeface="Times New Roman" pitchFamily="34" charset="-122"/>
+                <a:cs typeface="Times New Roman" pitchFamily="34" charset="-120"/>
+              </a:rPr>
+              <a:t>Problem</a:t>
+            </a:r>
+            <a:endParaRPr lang="en-US" sz="2300" dirty="0"/>
+          </a:p>
+        </p:txBody>
+      </p:sp>
+      <p:sp>
+        <p:nvSpPr>
+          <p:cNvPr id="4" name="Shape 2"/>
+          <p:cNvSpPr/>
+          <p:nvPr/>
+        </p:nvSpPr>
+        <p:spPr>
+          <a:xfrm>
+            <a:off x="3200400" y="1920240"/>
+            <a:ext cx="0" cy="1783080"/>
+          </a:xfrm>
+          <a:prstGeom prst="line">
+            <a:avLst/>
+          </a:prstGeom>
+          <a:noFill/>
+          <a:ln w="31750">
             <a:solidFill>
               <a:srgbClr val="D9A62E"/>
             </a:solidFill>
@@ -3136,53 +3261,14 @@
       </p:sp>
       <p:sp>
         <p:nvSpPr>
-          <p:cNvPr id="4" name="Text 2"/>
-          <p:cNvSpPr/>
-          <p:nvPr/>
-        </p:nvSpPr>
-        <p:spPr>
-          <a:xfrm>
-            <a:off x="960120" y="2103120"/>
-            <a:ext cx="3657600" cy="457200"/>
-          </a:xfrm>
-          <a:prstGeom prst="rect">
-            <a:avLst/>
-          </a:prstGeom>
-          <a:noFill/>
-          <a:ln/>
-        </p:spPr>
-        <p:txBody>
-          <a:bodyPr wrap="square" lIns="0" tIns="0" rIns="0" bIns="0" rtlCol="0" anchor="ctr"/>
-          <a:lstStyle/>
-          <a:p>
-            <a:pPr indent="0" marL="0">
-              <a:buNone/>
-            </a:pPr>
-            <a:r>
-              <a:rPr lang="en-US" sz="1900" b="1" dirty="0">
-                <a:solidFill>
-                  <a:srgbClr val="D9A62E"/>
-                </a:solidFill>
-                <a:latin typeface="Times New Roman" pitchFamily="34" charset="0"/>
-                <a:ea typeface="Times New Roman" pitchFamily="34" charset="-122"/>
-                <a:cs typeface="Times New Roman" pitchFamily="34" charset="-120"/>
-              </a:rPr>
-              <a:t>Problem</a:t>
-            </a:r>
-            <a:endParaRPr lang="en-US" sz="1900" dirty="0"/>
-          </a:p>
-        </p:txBody>
-      </p:sp>
-      <p:sp>
-        <p:nvSpPr>
           <p:cNvPr id="5" name="Text 3"/>
           <p:cNvSpPr/>
           <p:nvPr/>
         </p:nvSpPr>
         <p:spPr>
           <a:xfrm>
-            <a:off x="960120" y="2651760"/>
-            <a:ext cx="4343400" cy="3200400"/>
+            <a:off x="3474720" y="1920240"/>
+            <a:ext cx="7955280" cy="1920240"/>
           </a:xfrm>
           <a:prstGeom prst="rect">
             <a:avLst/>
@@ -3201,7 +3287,7 @@
               <a:buNone/>
             </a:pPr>
             <a:r>
-              <a:rPr lang="en-US" sz="1350" dirty="0">
+              <a:rPr lang="en-US" sz="1450" dirty="0">
                 <a:solidFill>
                   <a:srgbClr val="231D13"/>
                 </a:solidFill>
@@ -3211,30 +3297,65 @@
               </a:rPr>
               <a:t>All three AWS-facing classes — dashboard, processor and queue publisher — hardcoded a fixed pair of test credentials into every client they built. LocalStack expects exactly those test values, so all 90 tests passed and every local run looked perfect. On real AWS, the same pair overrides the IAM role, and every call to DynamoDB, SQS or Lambda would fail authentication.</a:t>
             </a:r>
-            <a:endParaRPr lang="en-US" sz="1350" dirty="0"/>
-          </a:p>
-        </p:txBody>
-      </p:sp>
-      <p:sp>
-        <p:nvSpPr>
-          <p:cNvPr id="6" name="Shape 4"/>
-          <p:cNvSpPr/>
-          <p:nvPr/>
-        </p:nvSpPr>
-        <p:spPr>
-          <a:xfrm>
-            <a:off x="6611112" y="1874520"/>
-            <a:ext cx="4937760" cy="4160520"/>
-          </a:xfrm>
-          <a:prstGeom prst="roundRect">
-            <a:avLst>
-              <a:gd name="adj" fmla="val 2198"/>
-            </a:avLst>
-          </a:prstGeom>
-          <a:solidFill>
-            <a:srgbClr val="F4EFE4"/>
-          </a:solidFill>
-          <a:ln w="19050">
+            <a:endParaRPr lang="en-US" sz="1450" dirty="0"/>
+          </a:p>
+        </p:txBody>
+      </p:sp>
+      <p:sp>
+        <p:nvSpPr>
+          <p:cNvPr id="6" name="Text 4"/>
+          <p:cNvSpPr/>
+          <p:nvPr/>
+        </p:nvSpPr>
+        <p:spPr>
+          <a:xfrm>
+            <a:off x="731520" y="4114800"/>
+            <a:ext cx="2377440" cy="548640"/>
+          </a:xfrm>
+          <a:prstGeom prst="rect">
+            <a:avLst/>
+          </a:prstGeom>
+          <a:noFill/>
+          <a:ln/>
+        </p:spPr>
+        <p:txBody>
+          <a:bodyPr wrap="square" lIns="0" tIns="0" rIns="0" bIns="0" rtlCol="0" anchor="ctr"/>
+          <a:lstStyle/>
+          <a:p>
+            <a:pPr indent="0" marL="0">
+              <a:buNone/>
+            </a:pPr>
+            <a:r>
+              <a:rPr lang="en-US" sz="2300" b="1" dirty="0">
+                <a:solidFill>
+                  <a:srgbClr val="7C5F2A"/>
+                </a:solidFill>
+                <a:latin typeface="Times New Roman" pitchFamily="34" charset="0"/>
+                <a:ea typeface="Times New Roman" pitchFamily="34" charset="-122"/>
+                <a:cs typeface="Times New Roman" pitchFamily="34" charset="-120"/>
+              </a:rPr>
+              <a:t>Solution</a:t>
+            </a:r>
+            <a:endParaRPr lang="en-US" sz="2300" dirty="0"/>
+          </a:p>
+        </p:txBody>
+      </p:sp>
+      <p:sp>
+        <p:nvSpPr>
+          <p:cNvPr id="7" name="Shape 5"/>
+          <p:cNvSpPr/>
+          <p:nvPr/>
+        </p:nvSpPr>
+        <p:spPr>
+          <a:xfrm>
+            <a:off x="3200400" y="4069080"/>
+            <a:ext cx="0" cy="1783080"/>
+          </a:xfrm>
+          <a:prstGeom prst="line">
+            <a:avLst/>
+          </a:prstGeom>
+          <a:noFill/>
+          <a:ln w="31750">
             <a:solidFill>
               <a:srgbClr val="7C5F2A"/>
             </a:solidFill>
@@ -3244,53 +3365,14 @@
       </p:sp>
       <p:sp>
         <p:nvSpPr>
-          <p:cNvPr id="7" name="Text 5"/>
-          <p:cNvSpPr/>
-          <p:nvPr/>
-        </p:nvSpPr>
-        <p:spPr>
-          <a:xfrm>
-            <a:off x="6931152" y="2103120"/>
-            <a:ext cx="3657600" cy="457200"/>
-          </a:xfrm>
-          <a:prstGeom prst="rect">
-            <a:avLst/>
-          </a:prstGeom>
-          <a:noFill/>
-          <a:ln/>
-        </p:spPr>
-        <p:txBody>
-          <a:bodyPr wrap="square" lIns="0" tIns="0" rIns="0" bIns="0" rtlCol="0" anchor="ctr"/>
-          <a:lstStyle/>
-          <a:p>
-            <a:pPr indent="0" marL="0">
-              <a:buNone/>
-            </a:pPr>
-            <a:r>
-              <a:rPr lang="en-US" sz="1900" b="1" dirty="0">
-                <a:solidFill>
-                  <a:srgbClr val="7C5F2A"/>
-                </a:solidFill>
-                <a:latin typeface="Times New Roman" pitchFamily="34" charset="0"/>
-                <a:ea typeface="Times New Roman" pitchFamily="34" charset="-122"/>
-                <a:cs typeface="Times New Roman" pitchFamily="34" charset="-120"/>
-              </a:rPr>
-              <a:t>Solution</a:t>
-            </a:r>
-            <a:endParaRPr lang="en-US" sz="1900" dirty="0"/>
-          </a:p>
-        </p:txBody>
-      </p:sp>
-      <p:sp>
-        <p:nvSpPr>
           <p:cNvPr id="8" name="Text 6"/>
           <p:cNvSpPr/>
           <p:nvPr/>
         </p:nvSpPr>
         <p:spPr>
           <a:xfrm>
-            <a:off x="6931152" y="2651760"/>
-            <a:ext cx="4343400" cy="3200400"/>
+            <a:off x="3474720" y="4069080"/>
+            <a:ext cx="7955280" cy="1920240"/>
           </a:xfrm>
           <a:prstGeom prst="rect">
             <a:avLst/>
@@ -3309,7 +3391,7 @@
               <a:buNone/>
             </a:pPr>
             <a:r>
-              <a:rPr lang="en-US" sz="1350" dirty="0">
+              <a:rPr lang="en-US" sz="1450" dirty="0">
                 <a:solidFill>
                   <a:srgbClr val="231D13"/>
                 </a:solidFill>
@@ -3319,29 +3401,9 @@
               </a:rPr>
               <a:t>Build static credentials only when a LocalStack endpoint is configured; otherwise fall through to the Lambda role or EC2 instance profile. All three constructors were audited side by side before deployment — so the bug never reached the live account, and four of four health checks were true on the very first live check.</a:t>
             </a:r>
-            <a:endParaRPr lang="en-US" sz="1350" dirty="0"/>
-          </a:p>
-        </p:txBody>
-      </p:sp>
-      <p:sp>
-        <p:nvSpPr>
-          <p:cNvPr id="9" name="Shape 7"/>
-          <p:cNvSpPr/>
-          <p:nvPr/>
-        </p:nvSpPr>
-        <p:spPr>
-          <a:xfrm>
-            <a:off x="5669280" y="3703320"/>
-            <a:ext cx="841248" cy="512064"/>
-          </a:xfrm>
-          <a:prstGeom prst="rightArrow">
-            <a:avLst/>
-          </a:prstGeom>
-          <a:solidFill>
-            <a:srgbClr val="5A4420"/>
-          </a:solidFill>
-          <a:ln/>
-        </p:spPr>
+            <a:endParaRPr lang="en-US" sz="1450" dirty="0"/>
+          </a:p>
+        </p:txBody>
       </p:sp>
     </p:spTree>
   </p:cSld>

--- a/ppt/JaipalKasireddy_X25156381_smart-mining-safety.pptx
+++ b/ppt/JaipalKasireddy_X25156381_smart-mining-safety.pptx
@@ -2669,59 +2669,24 @@
       </p:sp>
       <p:sp>
         <p:nvSpPr>
-          <p:cNvPr id="4" name="Text 2"/>
-          <p:cNvSpPr/>
-          <p:nvPr/>
-        </p:nvSpPr>
-        <p:spPr>
-          <a:xfrm>
-            <a:off x="640080" y="1737360"/>
-            <a:ext cx="1097280" cy="1097280"/>
-          </a:xfrm>
-          <a:prstGeom prst="rect">
-            <a:avLst/>
-          </a:prstGeom>
-          <a:noFill/>
-          <a:ln/>
-        </p:spPr>
-        <p:txBody>
-          <a:bodyPr wrap="square" lIns="0" tIns="0" rIns="0" bIns="0" rtlCol="0" anchor="ctr"/>
-          <a:lstStyle/>
-          <a:p>
-            <a:pPr indent="0" marL="0">
-              <a:buNone/>
-            </a:pPr>
-            <a:r>
-              <a:rPr lang="en-US" sz="5400" b="1" dirty="0">
-                <a:solidFill>
-                  <a:srgbClr val="F4EFE4"/>
-                </a:solidFill>
-                <a:latin typeface="Times New Roman" pitchFamily="34" charset="0"/>
-                <a:ea typeface="Times New Roman" pitchFamily="34" charset="-122"/>
-                <a:cs typeface="Times New Roman" pitchFamily="34" charset="-120"/>
-              </a:rPr>
-              <a:t>1</a:t>
-            </a:r>
-            <a:endParaRPr lang="en-US" sz="5400" dirty="0"/>
-          </a:p>
-        </p:txBody>
-      </p:sp>
-      <p:sp>
-        <p:nvSpPr>
-          <p:cNvPr id="5" name="Shape 3"/>
-          <p:cNvSpPr/>
-          <p:nvPr/>
-        </p:nvSpPr>
-        <p:spPr>
-          <a:xfrm>
-            <a:off x="1828800" y="1920240"/>
-            <a:ext cx="0" cy="1051560"/>
-          </a:xfrm>
-          <a:prstGeom prst="line">
-            <a:avLst/>
-          </a:prstGeom>
-          <a:noFill/>
-          <a:ln w="25400">
+          <p:cNvPr id="4" name="Shape 2"/>
+          <p:cNvSpPr/>
+          <p:nvPr/>
+        </p:nvSpPr>
+        <p:spPr>
+          <a:xfrm>
+            <a:off x="640080" y="1828800"/>
+            <a:ext cx="10881360" cy="1371600"/>
+          </a:xfrm>
+          <a:prstGeom prst="roundRect">
+            <a:avLst>
+              <a:gd name="adj" fmla="val 6667"/>
+            </a:avLst>
+          </a:prstGeom>
+          <a:solidFill>
+            <a:srgbClr val="F4EFE4"/>
+          </a:solidFill>
+          <a:ln w="15240">
             <a:solidFill>
               <a:srgbClr val="7C5F2A"/>
             </a:solidFill>
@@ -2731,14 +2696,34 @@
       </p:sp>
       <p:sp>
         <p:nvSpPr>
+          <p:cNvPr id="5" name="Shape 3"/>
+          <p:cNvSpPr/>
+          <p:nvPr/>
+        </p:nvSpPr>
+        <p:spPr>
+          <a:xfrm>
+            <a:off x="960120" y="2203704"/>
+            <a:ext cx="621792" cy="621792"/>
+          </a:xfrm>
+          <a:prstGeom prst="ellipse">
+            <a:avLst/>
+          </a:prstGeom>
+          <a:solidFill>
+            <a:srgbClr val="5A4420"/>
+          </a:solidFill>
+          <a:ln/>
+        </p:spPr>
+      </p:sp>
+      <p:sp>
+        <p:nvSpPr>
           <p:cNvPr id="6" name="Text 4"/>
           <p:cNvSpPr/>
           <p:nvPr/>
         </p:nvSpPr>
         <p:spPr>
           <a:xfrm>
-            <a:off x="2057400" y="1874520"/>
-            <a:ext cx="9509760" cy="411480"/>
+            <a:off x="960120" y="2203704"/>
+            <a:ext cx="621792" cy="621792"/>
           </a:xfrm>
           <a:prstGeom prst="rect">
             <a:avLst/>
@@ -2750,11 +2735,50 @@
           <a:bodyPr wrap="square" lIns="0" tIns="0" rIns="0" bIns="0" rtlCol="0" anchor="ctr"/>
           <a:lstStyle/>
           <a:p>
+            <a:pPr algn="ctr" indent="0" marL="0">
+              <a:buNone/>
+            </a:pPr>
+            <a:r>
+              <a:rPr lang="en-US" sz="2200" b="1" dirty="0">
+                <a:solidFill>
+                  <a:srgbClr val="FFFFFF"/>
+                </a:solidFill>
+                <a:latin typeface="Times New Roman" pitchFamily="34" charset="0"/>
+                <a:ea typeface="Times New Roman" pitchFamily="34" charset="-122"/>
+                <a:cs typeface="Times New Roman" pitchFamily="34" charset="-120"/>
+              </a:rPr>
+              <a:t>1</a:t>
+            </a:r>
+            <a:endParaRPr lang="en-US" sz="2200" dirty="0"/>
+          </a:p>
+        </p:txBody>
+      </p:sp>
+      <p:sp>
+        <p:nvSpPr>
+          <p:cNvPr id="7" name="Text 5"/>
+          <p:cNvSpPr/>
+          <p:nvPr/>
+        </p:nvSpPr>
+        <p:spPr>
+          <a:xfrm>
+            <a:off x="1828800" y="2029968"/>
+            <a:ext cx="9418320" cy="411480"/>
+          </a:xfrm>
+          <a:prstGeom prst="rect">
+            <a:avLst/>
+          </a:prstGeom>
+          <a:noFill/>
+          <a:ln/>
+        </p:spPr>
+        <p:txBody>
+          <a:bodyPr wrap="square" lIns="0" tIns="0" rIns="0" bIns="0" rtlCol="0" anchor="ctr"/>
+          <a:lstStyle/>
+          <a:p>
             <a:pPr indent="0" marL="0">
               <a:buNone/>
             </a:pPr>
             <a:r>
-              <a:rPr lang="en-US" sz="1800" b="1" dirty="0">
+              <a:rPr lang="en-US" sz="1700" b="1" dirty="0">
                 <a:solidFill>
                   <a:srgbClr val="231D13"/>
                 </a:solidFill>
@@ -2764,20 +2788,20 @@
               </a:rPr>
               <a:t>SAFE, CAUTION or DANGER per shaft</a:t>
             </a:r>
-            <a:endParaRPr lang="en-US" sz="1800" dirty="0"/>
-          </a:p>
-        </p:txBody>
-      </p:sp>
-      <p:sp>
-        <p:nvSpPr>
-          <p:cNvPr id="7" name="Text 5"/>
-          <p:cNvSpPr/>
-          <p:nvPr/>
-        </p:nvSpPr>
-        <p:spPr>
-          <a:xfrm>
-            <a:off x="2057400" y="2313432"/>
-            <a:ext cx="9509760" cy="822960"/>
+            <a:endParaRPr lang="en-US" sz="1700" dirty="0"/>
+          </a:p>
+        </p:txBody>
+      </p:sp>
+      <p:sp>
+        <p:nvSpPr>
+          <p:cNvPr id="8" name="Text 6"/>
+          <p:cNvSpPr/>
+          <p:nvPr/>
+        </p:nvSpPr>
+        <p:spPr>
+          <a:xfrm>
+            <a:off x="1828800" y="2450592"/>
+            <a:ext cx="9418320" cy="594360"/>
           </a:xfrm>
           <a:prstGeom prst="rect">
             <a:avLst/>
@@ -2790,10 +2814,13 @@
           <a:lstStyle/>
           <a:p>
             <a:pPr indent="0" marL="0">
-              <a:buNone/>
-            </a:pPr>
-            <a:r>
-              <a:rPr lang="en-US" sz="1350" dirty="0">
+              <a:lnSpc>
+                <a:spcPct val="105000"/>
+              </a:lnSpc>
+              <a:buNone/>
+            </a:pPr>
+            <a:r>
+              <a:rPr lang="en-US" sz="1300" dirty="0">
                 <a:solidFill>
                   <a:srgbClr val="6E6248"/>
                 </a:solidFill>
@@ -2803,46 +2830,7 @@
               </a:rPr>
               <a:t>Each shaft carries a single live verdict rolled up from methane, CO, dust, vibration and airflow against their hard limits.</a:t>
             </a:r>
-            <a:endParaRPr lang="en-US" sz="1350" dirty="0"/>
-          </a:p>
-        </p:txBody>
-      </p:sp>
-      <p:sp>
-        <p:nvSpPr>
-          <p:cNvPr id="8" name="Text 6"/>
-          <p:cNvSpPr/>
-          <p:nvPr/>
-        </p:nvSpPr>
-        <p:spPr>
-          <a:xfrm>
-            <a:off x="640080" y="3200400"/>
-            <a:ext cx="1097280" cy="1097280"/>
-          </a:xfrm>
-          <a:prstGeom prst="rect">
-            <a:avLst/>
-          </a:prstGeom>
-          <a:noFill/>
-          <a:ln/>
-        </p:spPr>
-        <p:txBody>
-          <a:bodyPr wrap="square" lIns="0" tIns="0" rIns="0" bIns="0" rtlCol="0" anchor="ctr"/>
-          <a:lstStyle/>
-          <a:p>
-            <a:pPr indent="0" marL="0">
-              <a:buNone/>
-            </a:pPr>
-            <a:r>
-              <a:rPr lang="en-US" sz="5400" b="1" dirty="0">
-                <a:solidFill>
-                  <a:srgbClr val="F4EFE4"/>
-                </a:solidFill>
-                <a:latin typeface="Times New Roman" pitchFamily="34" charset="0"/>
-                <a:ea typeface="Times New Roman" pitchFamily="34" charset="-122"/>
-                <a:cs typeface="Times New Roman" pitchFamily="34" charset="-120"/>
-              </a:rPr>
-              <a:t>2</a:t>
-            </a:r>
-            <a:endParaRPr lang="en-US" sz="5400" dirty="0"/>
+            <a:endParaRPr lang="en-US" sz="1300" dirty="0"/>
           </a:p>
         </p:txBody>
       </p:sp>
@@ -2854,14 +2842,18 @@
         </p:nvSpPr>
         <p:spPr>
           <a:xfrm>
-            <a:off x="1828800" y="3383280"/>
-            <a:ext cx="0" cy="1051560"/>
-          </a:xfrm>
-          <a:prstGeom prst="line">
-            <a:avLst/>
-          </a:prstGeom>
-          <a:noFill/>
-          <a:ln w="25400">
+            <a:off x="640080" y="3401568"/>
+            <a:ext cx="5303520" cy="2606040"/>
+          </a:xfrm>
+          <a:prstGeom prst="roundRect">
+            <a:avLst>
+              <a:gd name="adj" fmla="val 3509"/>
+            </a:avLst>
+          </a:prstGeom>
+          <a:solidFill>
+            <a:srgbClr val="F4EFE4"/>
+          </a:solidFill>
+          <a:ln w="15240">
             <a:solidFill>
               <a:srgbClr val="7C5F2A"/>
             </a:solidFill>
@@ -2871,14 +2863,34 @@
       </p:sp>
       <p:sp>
         <p:nvSpPr>
-          <p:cNvPr id="10" name="Text 8"/>
-          <p:cNvSpPr/>
-          <p:nvPr/>
-        </p:nvSpPr>
-        <p:spPr>
-          <a:xfrm>
-            <a:off x="2057400" y="3337560"/>
-            <a:ext cx="9509760" cy="411480"/>
+          <p:cNvPr id="10" name="Shape 8"/>
+          <p:cNvSpPr/>
+          <p:nvPr/>
+        </p:nvSpPr>
+        <p:spPr>
+          <a:xfrm>
+            <a:off x="914400" y="3675888"/>
+            <a:ext cx="603504" cy="603504"/>
+          </a:xfrm>
+          <a:prstGeom prst="ellipse">
+            <a:avLst/>
+          </a:prstGeom>
+          <a:solidFill>
+            <a:srgbClr val="5A4420"/>
+          </a:solidFill>
+          <a:ln/>
+        </p:spPr>
+      </p:sp>
+      <p:sp>
+        <p:nvSpPr>
+          <p:cNvPr id="11" name="Text 9"/>
+          <p:cNvSpPr/>
+          <p:nvPr/>
+        </p:nvSpPr>
+        <p:spPr>
+          <a:xfrm>
+            <a:off x="914400" y="3675888"/>
+            <a:ext cx="603504" cy="603504"/>
           </a:xfrm>
           <a:prstGeom prst="rect">
             <a:avLst/>
@@ -2890,11 +2902,50 @@
           <a:bodyPr wrap="square" lIns="0" tIns="0" rIns="0" bIns="0" rtlCol="0" anchor="ctr"/>
           <a:lstStyle/>
           <a:p>
+            <a:pPr algn="ctr" indent="0" marL="0">
+              <a:buNone/>
+            </a:pPr>
+            <a:r>
+              <a:rPr lang="en-US" sz="2200" b="1" dirty="0">
+                <a:solidFill>
+                  <a:srgbClr val="FFFFFF"/>
+                </a:solidFill>
+                <a:latin typeface="Times New Roman" pitchFamily="34" charset="0"/>
+                <a:ea typeface="Times New Roman" pitchFamily="34" charset="-122"/>
+                <a:cs typeface="Times New Roman" pitchFamily="34" charset="-120"/>
+              </a:rPr>
+              <a:t>2</a:t>
+            </a:r>
+            <a:endParaRPr lang="en-US" sz="2200" dirty="0"/>
+          </a:p>
+        </p:txBody>
+      </p:sp>
+      <p:sp>
+        <p:nvSpPr>
+          <p:cNvPr id="12" name="Text 10"/>
+          <p:cNvSpPr/>
+          <p:nvPr/>
+        </p:nvSpPr>
+        <p:spPr>
+          <a:xfrm>
+            <a:off x="914400" y="4425696"/>
+            <a:ext cx="4754880" cy="777240"/>
+          </a:xfrm>
+          <a:prstGeom prst="rect">
+            <a:avLst/>
+          </a:prstGeom>
+          <a:noFill/>
+          <a:ln/>
+        </p:spPr>
+        <p:txBody>
+          <a:bodyPr wrap="square" lIns="0" tIns="0" rIns="0" bIns="0" rtlCol="0" anchor="ctr"/>
+          <a:lstStyle/>
+          <a:p>
             <a:pPr indent="0" marL="0">
               <a:buNone/>
             </a:pPr>
             <a:r>
-              <a:rPr lang="en-US" sz="1800" b="1" dirty="0">
+              <a:rPr lang="en-US" sz="1600" b="1" dirty="0">
                 <a:solidFill>
                   <a:srgbClr val="231D13"/>
                 </a:solidFill>
@@ -2904,20 +2955,20 @@
               </a:rPr>
               <a:t>A DANGER classification on real data</a:t>
             </a:r>
-            <a:endParaRPr lang="en-US" sz="1800" dirty="0"/>
-          </a:p>
-        </p:txBody>
-      </p:sp>
-      <p:sp>
-        <p:nvSpPr>
-          <p:cNvPr id="11" name="Text 9"/>
-          <p:cNvSpPr/>
-          <p:nvPr/>
-        </p:nvSpPr>
-        <p:spPr>
-          <a:xfrm>
-            <a:off x="2057400" y="3776472"/>
-            <a:ext cx="9509760" cy="822960"/>
+            <a:endParaRPr lang="en-US" sz="1600" dirty="0"/>
+          </a:p>
+        </p:txBody>
+      </p:sp>
+      <p:sp>
+        <p:nvSpPr>
+          <p:cNvPr id="13" name="Text 11"/>
+          <p:cNvSpPr/>
+          <p:nvPr/>
+        </p:nvSpPr>
+        <p:spPr>
+          <a:xfrm>
+            <a:off x="914400" y="5184648"/>
+            <a:ext cx="4754880" cy="640080"/>
           </a:xfrm>
           <a:prstGeom prst="rect">
             <a:avLst/>
@@ -2930,10 +2981,13 @@
           <a:lstStyle/>
           <a:p>
             <a:pPr indent="0" marL="0">
-              <a:buNone/>
-            </a:pPr>
-            <a:r>
-              <a:rPr lang="en-US" sz="1350" dirty="0">
+              <a:lnSpc>
+                <a:spcPct val="106000"/>
+              </a:lnSpc>
+              <a:buNone/>
+            </a:pPr>
+            <a:r>
+              <a:rPr lang="en-US" sz="1250" dirty="0">
                 <a:solidFill>
                   <a:srgbClr val="6E6248"/>
                 </a:solidFill>
@@ -2943,65 +2997,30 @@
               </a:rPr>
               <a:t>A silica-dust breach classifies shaft-A as DANGER while shaft-B holds SAFE, with zero console or CORS errors.</a:t>
             </a:r>
-            <a:endParaRPr lang="en-US" sz="1350" dirty="0"/>
-          </a:p>
-        </p:txBody>
-      </p:sp>
-      <p:sp>
-        <p:nvSpPr>
-          <p:cNvPr id="12" name="Text 10"/>
-          <p:cNvSpPr/>
-          <p:nvPr/>
-        </p:nvSpPr>
-        <p:spPr>
-          <a:xfrm>
-            <a:off x="640080" y="4663440"/>
-            <a:ext cx="1097280" cy="1097280"/>
-          </a:xfrm>
-          <a:prstGeom prst="rect">
-            <a:avLst/>
-          </a:prstGeom>
-          <a:noFill/>
-          <a:ln/>
-        </p:spPr>
-        <p:txBody>
-          <a:bodyPr wrap="square" lIns="0" tIns="0" rIns="0" bIns="0" rtlCol="0" anchor="ctr"/>
-          <a:lstStyle/>
-          <a:p>
-            <a:pPr indent="0" marL="0">
-              <a:buNone/>
-            </a:pPr>
-            <a:r>
-              <a:rPr lang="en-US" sz="5400" b="1" dirty="0">
-                <a:solidFill>
-                  <a:srgbClr val="F4EFE4"/>
-                </a:solidFill>
-                <a:latin typeface="Times New Roman" pitchFamily="34" charset="0"/>
-                <a:ea typeface="Times New Roman" pitchFamily="34" charset="-122"/>
-                <a:cs typeface="Times New Roman" pitchFamily="34" charset="-120"/>
-              </a:rPr>
-              <a:t>3</a:t>
-            </a:r>
-            <a:endParaRPr lang="en-US" sz="5400" dirty="0"/>
-          </a:p>
-        </p:txBody>
-      </p:sp>
-      <p:sp>
-        <p:nvSpPr>
-          <p:cNvPr id="13" name="Shape 11"/>
-          <p:cNvSpPr/>
-          <p:nvPr/>
-        </p:nvSpPr>
-        <p:spPr>
-          <a:xfrm>
-            <a:off x="1828800" y="4846320"/>
-            <a:ext cx="0" cy="1051560"/>
-          </a:xfrm>
-          <a:prstGeom prst="line">
-            <a:avLst/>
-          </a:prstGeom>
-          <a:noFill/>
-          <a:ln w="25400">
+            <a:endParaRPr lang="en-US" sz="1250" dirty="0"/>
+          </a:p>
+        </p:txBody>
+      </p:sp>
+      <p:sp>
+        <p:nvSpPr>
+          <p:cNvPr id="14" name="Shape 12"/>
+          <p:cNvSpPr/>
+          <p:nvPr/>
+        </p:nvSpPr>
+        <p:spPr>
+          <a:xfrm>
+            <a:off x="6217920" y="3401568"/>
+            <a:ext cx="5303520" cy="2606040"/>
+          </a:xfrm>
+          <a:prstGeom prst="roundRect">
+            <a:avLst>
+              <a:gd name="adj" fmla="val 3509"/>
+            </a:avLst>
+          </a:prstGeom>
+          <a:solidFill>
+            <a:srgbClr val="F4EFE4"/>
+          </a:solidFill>
+          <a:ln w="15240">
             <a:solidFill>
               <a:srgbClr val="7C5F2A"/>
             </a:solidFill>
@@ -3011,14 +3030,34 @@
       </p:sp>
       <p:sp>
         <p:nvSpPr>
-          <p:cNvPr id="14" name="Text 12"/>
-          <p:cNvSpPr/>
-          <p:nvPr/>
-        </p:nvSpPr>
-        <p:spPr>
-          <a:xfrm>
-            <a:off x="2057400" y="4800600"/>
-            <a:ext cx="9509760" cy="411480"/>
+          <p:cNvPr id="15" name="Shape 13"/>
+          <p:cNvSpPr/>
+          <p:nvPr/>
+        </p:nvSpPr>
+        <p:spPr>
+          <a:xfrm>
+            <a:off x="6492240" y="3675888"/>
+            <a:ext cx="603504" cy="603504"/>
+          </a:xfrm>
+          <a:prstGeom prst="ellipse">
+            <a:avLst/>
+          </a:prstGeom>
+          <a:solidFill>
+            <a:srgbClr val="5A4420"/>
+          </a:solidFill>
+          <a:ln/>
+        </p:spPr>
+      </p:sp>
+      <p:sp>
+        <p:nvSpPr>
+          <p:cNvPr id="16" name="Text 14"/>
+          <p:cNvSpPr/>
+          <p:nvPr/>
+        </p:nvSpPr>
+        <p:spPr>
+          <a:xfrm>
+            <a:off x="6492240" y="3675888"/>
+            <a:ext cx="603504" cy="603504"/>
           </a:xfrm>
           <a:prstGeom prst="rect">
             <a:avLst/>
@@ -3030,11 +3069,50 @@
           <a:bodyPr wrap="square" lIns="0" tIns="0" rIns="0" bIns="0" rtlCol="0" anchor="ctr"/>
           <a:lstStyle/>
           <a:p>
+            <a:pPr algn="ctr" indent="0" marL="0">
+              <a:buNone/>
+            </a:pPr>
+            <a:r>
+              <a:rPr lang="en-US" sz="2200" b="1" dirty="0">
+                <a:solidFill>
+                  <a:srgbClr val="FFFFFF"/>
+                </a:solidFill>
+                <a:latin typeface="Times New Roman" pitchFamily="34" charset="0"/>
+                <a:ea typeface="Times New Roman" pitchFamily="34" charset="-122"/>
+                <a:cs typeface="Times New Roman" pitchFamily="34" charset="-120"/>
+              </a:rPr>
+              <a:t>3</a:t>
+            </a:r>
+            <a:endParaRPr lang="en-US" sz="2200" dirty="0"/>
+          </a:p>
+        </p:txBody>
+      </p:sp>
+      <p:sp>
+        <p:nvSpPr>
+          <p:cNvPr id="17" name="Text 15"/>
+          <p:cNvSpPr/>
+          <p:nvPr/>
+        </p:nvSpPr>
+        <p:spPr>
+          <a:xfrm>
+            <a:off x="6492240" y="4425696"/>
+            <a:ext cx="4754880" cy="777240"/>
+          </a:xfrm>
+          <a:prstGeom prst="rect">
+            <a:avLst/>
+          </a:prstGeom>
+          <a:noFill/>
+          <a:ln/>
+        </p:spPr>
+        <p:txBody>
+          <a:bodyPr wrap="square" lIns="0" tIns="0" rIns="0" bIns="0" rtlCol="0" anchor="ctr"/>
+          <a:lstStyle/>
+          <a:p>
             <a:pPr indent="0" marL="0">
               <a:buNone/>
             </a:pPr>
             <a:r>
-              <a:rPr lang="en-US" sz="1800" b="1" dirty="0">
+              <a:rPr lang="en-US" sz="1600" b="1" dirty="0">
                 <a:solidFill>
                   <a:srgbClr val="231D13"/>
                 </a:solidFill>
@@ -3044,20 +3122,20 @@
               </a:rPr>
               <a:t>Data climbing live</a:t>
             </a:r>
-            <a:endParaRPr lang="en-US" sz="1800" dirty="0"/>
-          </a:p>
-        </p:txBody>
-      </p:sp>
-      <p:sp>
-        <p:nvSpPr>
-          <p:cNvPr id="15" name="Text 13"/>
-          <p:cNvSpPr/>
-          <p:nvPr/>
-        </p:nvSpPr>
-        <p:spPr>
-          <a:xfrm>
-            <a:off x="2057400" y="5239512"/>
-            <a:ext cx="9509760" cy="822960"/>
+            <a:endParaRPr lang="en-US" sz="1600" dirty="0"/>
+          </a:p>
+        </p:txBody>
+      </p:sp>
+      <p:sp>
+        <p:nvSpPr>
+          <p:cNvPr id="18" name="Text 16"/>
+          <p:cNvSpPr/>
+          <p:nvPr/>
+        </p:nvSpPr>
+        <p:spPr>
+          <a:xfrm>
+            <a:off x="6492240" y="5184648"/>
+            <a:ext cx="4754880" cy="640080"/>
           </a:xfrm>
           <a:prstGeom prst="rect">
             <a:avLst/>
@@ -3070,10 +3148,13 @@
           <a:lstStyle/>
           <a:p>
             <a:pPr indent="0" marL="0">
-              <a:buNone/>
-            </a:pPr>
-            <a:r>
-              <a:rPr lang="en-US" sz="1350" dirty="0">
+              <a:lnSpc>
+                <a:spcPct val="106000"/>
+              </a:lnSpc>
+              <a:buNone/>
+            </a:pPr>
+            <a:r>
+              <a:rPr lang="en-US" sz="1250" dirty="0">
                 <a:solidFill>
                   <a:srgbClr val="6E6248"/>
                 </a:solidFill>
@@ -3083,46 +3164,7 @@
               </a:rPr>
               <a:t>Stored readings pass 1,400 during the verification window and keep rising, so the board reads live data.</a:t>
             </a:r>
-            <a:endParaRPr lang="en-US" sz="1350" dirty="0"/>
-          </a:p>
-        </p:txBody>
-      </p:sp>
-      <p:sp>
-        <p:nvSpPr>
-          <p:cNvPr id="16" name="Text 14"/>
-          <p:cNvSpPr/>
-          <p:nvPr/>
-        </p:nvSpPr>
-        <p:spPr>
-          <a:xfrm>
-            <a:off x="640080" y="6309360"/>
-            <a:ext cx="10972800" cy="365760"/>
-          </a:xfrm>
-          <a:prstGeom prst="rect">
-            <a:avLst/>
-          </a:prstGeom>
-          <a:noFill/>
-          <a:ln/>
-        </p:spPr>
-        <p:txBody>
-          <a:bodyPr wrap="square" rtlCol="0" anchor="ctr"/>
-          <a:lstStyle/>
-          <a:p>
-            <a:pPr indent="0" marL="0">
-              <a:buNone/>
-            </a:pPr>
-            <a:r>
-              <a:rPr lang="en-US" sz="1300" i="1" dirty="0">
-                <a:solidFill>
-                  <a:srgbClr val="9A8248"/>
-                </a:solidFill>
-                <a:latin typeface="Calibri" pitchFamily="34" charset="0"/>
-                <a:ea typeface="Calibri" pitchFamily="34" charset="-122"/>
-                <a:cs typeface="Calibri" pitchFamily="34" charset="-120"/>
-              </a:rPr>
-              <a:t>Switch to the live dashboard here — backup video ready.</a:t>
-            </a:r>
-            <a:endParaRPr lang="en-US" sz="1300" dirty="0"/>
+            <a:endParaRPr lang="en-US" sz="1250" dirty="0"/>
           </a:p>
         </p:txBody>
       </p:sp>
@@ -3199,59 +3241,24 @@
       </p:sp>
       <p:sp>
         <p:nvSpPr>
-          <p:cNvPr id="3" name="Text 1"/>
-          <p:cNvSpPr/>
-          <p:nvPr/>
-        </p:nvSpPr>
-        <p:spPr>
-          <a:xfrm>
-            <a:off x="731520" y="1965960"/>
-            <a:ext cx="2377440" cy="548640"/>
-          </a:xfrm>
-          <a:prstGeom prst="rect">
-            <a:avLst/>
-          </a:prstGeom>
-          <a:noFill/>
-          <a:ln/>
-        </p:spPr>
-        <p:txBody>
-          <a:bodyPr wrap="square" lIns="0" tIns="0" rIns="0" bIns="0" rtlCol="0" anchor="ctr"/>
-          <a:lstStyle/>
-          <a:p>
-            <a:pPr indent="0" marL="0">
-              <a:buNone/>
-            </a:pPr>
-            <a:r>
-              <a:rPr lang="en-US" sz="2300" b="1" dirty="0">
-                <a:solidFill>
-                  <a:srgbClr val="D9A62E"/>
-                </a:solidFill>
-                <a:latin typeface="Times New Roman" pitchFamily="34" charset="0"/>
-                <a:ea typeface="Times New Roman" pitchFamily="34" charset="-122"/>
-                <a:cs typeface="Times New Roman" pitchFamily="34" charset="-120"/>
-              </a:rPr>
-              <a:t>Problem</a:t>
-            </a:r>
-            <a:endParaRPr lang="en-US" sz="2300" dirty="0"/>
-          </a:p>
-        </p:txBody>
-      </p:sp>
-      <p:sp>
-        <p:nvSpPr>
-          <p:cNvPr id="4" name="Shape 2"/>
-          <p:cNvSpPr/>
-          <p:nvPr/>
-        </p:nvSpPr>
-        <p:spPr>
-          <a:xfrm>
-            <a:off x="3200400" y="1920240"/>
-            <a:ext cx="0" cy="1783080"/>
-          </a:xfrm>
-          <a:prstGeom prst="line">
-            <a:avLst/>
-          </a:prstGeom>
-          <a:noFill/>
-          <a:ln w="31750">
+          <p:cNvPr id="3" name="Shape 1"/>
+          <p:cNvSpPr/>
+          <p:nvPr/>
+        </p:nvSpPr>
+        <p:spPr>
+          <a:xfrm>
+            <a:off x="731520" y="1920240"/>
+            <a:ext cx="10698480" cy="1965960"/>
+          </a:xfrm>
+          <a:prstGeom prst="roundRect">
+            <a:avLst>
+              <a:gd name="adj" fmla="val 4651"/>
+            </a:avLst>
+          </a:prstGeom>
+          <a:solidFill>
+            <a:srgbClr val="F4EFE4"/>
+          </a:solidFill>
+          <a:ln w="19050">
             <a:solidFill>
               <a:srgbClr val="D9A62E"/>
             </a:solidFill>
@@ -3261,14 +3268,53 @@
       </p:sp>
       <p:sp>
         <p:nvSpPr>
+          <p:cNvPr id="4" name="Text 2"/>
+          <p:cNvSpPr/>
+          <p:nvPr/>
+        </p:nvSpPr>
+        <p:spPr>
+          <a:xfrm>
+            <a:off x="1005840" y="2103120"/>
+            <a:ext cx="3657600" cy="457200"/>
+          </a:xfrm>
+          <a:prstGeom prst="rect">
+            <a:avLst/>
+          </a:prstGeom>
+          <a:noFill/>
+          <a:ln/>
+        </p:spPr>
+        <p:txBody>
+          <a:bodyPr wrap="square" lIns="0" tIns="0" rIns="0" bIns="0" rtlCol="0" anchor="ctr"/>
+          <a:lstStyle/>
+          <a:p>
+            <a:pPr indent="0" marL="0">
+              <a:buNone/>
+            </a:pPr>
+            <a:r>
+              <a:rPr lang="en-US" sz="1900" b="1" dirty="0">
+                <a:solidFill>
+                  <a:srgbClr val="D9A62E"/>
+                </a:solidFill>
+                <a:latin typeface="Times New Roman" pitchFamily="34" charset="0"/>
+                <a:ea typeface="Times New Roman" pitchFamily="34" charset="-122"/>
+                <a:cs typeface="Times New Roman" pitchFamily="34" charset="-120"/>
+              </a:rPr>
+              <a:t>Problem</a:t>
+            </a:r>
+            <a:endParaRPr lang="en-US" sz="1900" dirty="0"/>
+          </a:p>
+        </p:txBody>
+      </p:sp>
+      <p:sp>
+        <p:nvSpPr>
           <p:cNvPr id="5" name="Text 3"/>
           <p:cNvSpPr/>
           <p:nvPr/>
         </p:nvSpPr>
         <p:spPr>
           <a:xfrm>
-            <a:off x="3474720" y="1920240"/>
-            <a:ext cx="7955280" cy="1920240"/>
+            <a:off x="1005840" y="2578608"/>
+            <a:ext cx="9966960" cy="1188720"/>
           </a:xfrm>
           <a:prstGeom prst="rect">
             <a:avLst/>
@@ -3282,12 +3328,12 @@
           <a:p>
             <a:pPr indent="0" marL="0">
               <a:lnSpc>
-                <a:spcPct val="112000"/>
+                <a:spcPct val="105000"/>
               </a:lnSpc>
               <a:buNone/>
             </a:pPr>
             <a:r>
-              <a:rPr lang="en-US" sz="1450" dirty="0">
+              <a:rPr lang="en-US" sz="1300" dirty="0">
                 <a:solidFill>
                   <a:srgbClr val="231D13"/>
                 </a:solidFill>
@@ -3297,65 +3343,30 @@
               </a:rPr>
               <a:t>All three AWS-facing classes — dashboard, processor and queue publisher — hardcoded a fixed pair of test credentials into every client they built. LocalStack expects exactly those test values, so all 90 tests passed and every local run looked perfect. On real AWS, the same pair overrides the IAM role, and every call to DynamoDB, SQS or Lambda would fail authentication.</a:t>
             </a:r>
-            <a:endParaRPr lang="en-US" sz="1450" dirty="0"/>
-          </a:p>
-        </p:txBody>
-      </p:sp>
-      <p:sp>
-        <p:nvSpPr>
-          <p:cNvPr id="6" name="Text 4"/>
-          <p:cNvSpPr/>
-          <p:nvPr/>
-        </p:nvSpPr>
-        <p:spPr>
-          <a:xfrm>
-            <a:off x="731520" y="4114800"/>
-            <a:ext cx="2377440" cy="548640"/>
-          </a:xfrm>
-          <a:prstGeom prst="rect">
-            <a:avLst/>
-          </a:prstGeom>
-          <a:noFill/>
-          <a:ln/>
-        </p:spPr>
-        <p:txBody>
-          <a:bodyPr wrap="square" lIns="0" tIns="0" rIns="0" bIns="0" rtlCol="0" anchor="ctr"/>
-          <a:lstStyle/>
-          <a:p>
-            <a:pPr indent="0" marL="0">
-              <a:buNone/>
-            </a:pPr>
-            <a:r>
-              <a:rPr lang="en-US" sz="2300" b="1" dirty="0">
-                <a:solidFill>
-                  <a:srgbClr val="7C5F2A"/>
-                </a:solidFill>
-                <a:latin typeface="Times New Roman" pitchFamily="34" charset="0"/>
-                <a:ea typeface="Times New Roman" pitchFamily="34" charset="-122"/>
-                <a:cs typeface="Times New Roman" pitchFamily="34" charset="-120"/>
-              </a:rPr>
-              <a:t>Solution</a:t>
-            </a:r>
-            <a:endParaRPr lang="en-US" sz="2300" dirty="0"/>
-          </a:p>
-        </p:txBody>
-      </p:sp>
-      <p:sp>
-        <p:nvSpPr>
-          <p:cNvPr id="7" name="Shape 5"/>
-          <p:cNvSpPr/>
-          <p:nvPr/>
-        </p:nvSpPr>
-        <p:spPr>
-          <a:xfrm>
-            <a:off x="3200400" y="4069080"/>
-            <a:ext cx="0" cy="1783080"/>
-          </a:xfrm>
-          <a:prstGeom prst="line">
-            <a:avLst/>
-          </a:prstGeom>
-          <a:noFill/>
-          <a:ln w="31750">
+            <a:endParaRPr lang="en-US" sz="1300" dirty="0"/>
+          </a:p>
+        </p:txBody>
+      </p:sp>
+      <p:sp>
+        <p:nvSpPr>
+          <p:cNvPr id="6" name="Shape 4"/>
+          <p:cNvSpPr/>
+          <p:nvPr/>
+        </p:nvSpPr>
+        <p:spPr>
+          <a:xfrm>
+            <a:off x="731520" y="4041648"/>
+            <a:ext cx="10698480" cy="1965960"/>
+          </a:xfrm>
+          <a:prstGeom prst="roundRect">
+            <a:avLst>
+              <a:gd name="adj" fmla="val 4651"/>
+            </a:avLst>
+          </a:prstGeom>
+          <a:solidFill>
+            <a:srgbClr val="F4EFE4"/>
+          </a:solidFill>
+          <a:ln w="19050">
             <a:solidFill>
               <a:srgbClr val="7C5F2A"/>
             </a:solidFill>
@@ -3365,14 +3376,53 @@
       </p:sp>
       <p:sp>
         <p:nvSpPr>
+          <p:cNvPr id="7" name="Text 5"/>
+          <p:cNvSpPr/>
+          <p:nvPr/>
+        </p:nvSpPr>
+        <p:spPr>
+          <a:xfrm>
+            <a:off x="1005840" y="4224528"/>
+            <a:ext cx="3657600" cy="457200"/>
+          </a:xfrm>
+          <a:prstGeom prst="rect">
+            <a:avLst/>
+          </a:prstGeom>
+          <a:noFill/>
+          <a:ln/>
+        </p:spPr>
+        <p:txBody>
+          <a:bodyPr wrap="square" lIns="0" tIns="0" rIns="0" bIns="0" rtlCol="0" anchor="ctr"/>
+          <a:lstStyle/>
+          <a:p>
+            <a:pPr indent="0" marL="0">
+              <a:buNone/>
+            </a:pPr>
+            <a:r>
+              <a:rPr lang="en-US" sz="1900" b="1" dirty="0">
+                <a:solidFill>
+                  <a:srgbClr val="7C5F2A"/>
+                </a:solidFill>
+                <a:latin typeface="Times New Roman" pitchFamily="34" charset="0"/>
+                <a:ea typeface="Times New Roman" pitchFamily="34" charset="-122"/>
+                <a:cs typeface="Times New Roman" pitchFamily="34" charset="-120"/>
+              </a:rPr>
+              <a:t>Solution</a:t>
+            </a:r>
+            <a:endParaRPr lang="en-US" sz="1900" dirty="0"/>
+          </a:p>
+        </p:txBody>
+      </p:sp>
+      <p:sp>
+        <p:nvSpPr>
           <p:cNvPr id="8" name="Text 6"/>
           <p:cNvSpPr/>
           <p:nvPr/>
         </p:nvSpPr>
         <p:spPr>
           <a:xfrm>
-            <a:off x="3474720" y="4069080"/>
-            <a:ext cx="7955280" cy="1920240"/>
+            <a:off x="1005840" y="4700016"/>
+            <a:ext cx="9966960" cy="1188720"/>
           </a:xfrm>
           <a:prstGeom prst="rect">
             <a:avLst/>
@@ -3386,12 +3436,12 @@
           <a:p>
             <a:pPr indent="0" marL="0">
               <a:lnSpc>
-                <a:spcPct val="112000"/>
+                <a:spcPct val="105000"/>
               </a:lnSpc>
               <a:buNone/>
             </a:pPr>
             <a:r>
-              <a:rPr lang="en-US" sz="1450" dirty="0">
+              <a:rPr lang="en-US" sz="1300" dirty="0">
                 <a:solidFill>
                   <a:srgbClr val="231D13"/>
                 </a:solidFill>
@@ -3401,7 +3451,7 @@
               </a:rPr>
               <a:t>Build static credentials only when a LocalStack endpoint is configured; otherwise fall through to the Lambda role or EC2 instance profile. All three constructors were audited side by side before deployment — so the bug never reached the live account, and four of four health checks were true on the very first live check.</a:t>
             </a:r>
-            <a:endParaRPr lang="en-US" sz="1450" dirty="0"/>
+            <a:endParaRPr lang="en-US" sz="1300" dirty="0"/>
           </a:p>
         </p:txBody>
       </p:sp>

--- a/ppt/JaipalKasireddy_X25156381_smart-mining-safety.pptx
+++ b/ppt/JaipalKasireddy_X25156381_smart-mining-safety.pptx
@@ -1124,7 +1124,7 @@
     <p:bg>
       <p:bgPr>
         <a:solidFill>
-          <a:srgbClr val="241E14"/>
+          <a:srgbClr val="FFFFFF"/>
         </a:solidFill>
       </p:bgPr>
     </p:bg>
@@ -1169,7 +1169,7 @@
             <a:r>
               <a:rPr lang="en-US" sz="3800" b="1" dirty="0">
                 <a:solidFill>
-                  <a:srgbClr val="FFFFFF"/>
+                  <a:srgbClr val="231D13"/>
                 </a:solidFill>
                 <a:latin typeface="Times New Roman" pitchFamily="34" charset="0"/>
                 <a:ea typeface="Times New Roman" pitchFamily="34" charset="-122"/>
@@ -1208,7 +1208,7 @@
             <a:r>
               <a:rPr lang="en-US" sz="1600" dirty="0">
                 <a:solidFill>
-                  <a:srgbClr val="9A8248"/>
+                  <a:srgbClr val="7C5F2A"/>
                 </a:solidFill>
                 <a:latin typeface="Calibri" pitchFamily="34" charset="0"/>
                 <a:ea typeface="Calibri" pitchFamily="34" charset="-122"/>
@@ -1250,7 +1250,7 @@
             <a:r>
               <a:rPr lang="en-US" sz="2000" dirty="0">
                 <a:solidFill>
-                  <a:srgbClr val="E5D8BC"/>
+                  <a:srgbClr val="231D13"/>
                 </a:solidFill>
                 <a:latin typeface="Calibri" pitchFamily="34" charset="0"/>
                 <a:ea typeface="Calibri" pitchFamily="34" charset="-122"/>
@@ -1279,11 +1279,11 @@
             </a:avLst>
           </a:prstGeom>
           <a:solidFill>
-            <a:srgbClr val="2F2718"/>
+            <a:srgbClr val="F4EFE4"/>
           </a:solidFill>
           <a:ln w="12700">
             <a:solidFill>
-              <a:srgbClr val="D9A62E"/>
+              <a:srgbClr val="9A8248"/>
             </a:solidFill>
             <a:prstDash val="solid"/>
           </a:ln>
@@ -1316,7 +1316,7 @@
             <a:r>
               <a:rPr lang="en-US" sz="1350" b="1" dirty="0">
                 <a:solidFill>
-                  <a:srgbClr val="D9A62E"/>
+                  <a:srgbClr val="5A4420"/>
                 </a:solidFill>
                 <a:latin typeface="Calibri" pitchFamily="34" charset="0"/>
                 <a:ea typeface="Calibri" pitchFamily="34" charset="-122"/>
@@ -1345,11 +1345,11 @@
             </a:avLst>
           </a:prstGeom>
           <a:solidFill>
-            <a:srgbClr val="2F2718"/>
+            <a:srgbClr val="F4EFE4"/>
           </a:solidFill>
           <a:ln w="12700">
             <a:solidFill>
-              <a:srgbClr val="D9A62E"/>
+              <a:srgbClr val="9A8248"/>
             </a:solidFill>
             <a:prstDash val="solid"/>
           </a:ln>
@@ -1382,7 +1382,7 @@
             <a:r>
               <a:rPr lang="en-US" sz="1350" b="1" dirty="0">
                 <a:solidFill>
-                  <a:srgbClr val="D9A62E"/>
+                  <a:srgbClr val="5A4420"/>
                 </a:solidFill>
                 <a:latin typeface="Calibri" pitchFamily="34" charset="0"/>
                 <a:ea typeface="Calibri" pitchFamily="34" charset="-122"/>
@@ -1411,11 +1411,11 @@
             </a:avLst>
           </a:prstGeom>
           <a:solidFill>
-            <a:srgbClr val="2F2718"/>
+            <a:srgbClr val="F4EFE4"/>
           </a:solidFill>
           <a:ln w="12700">
             <a:solidFill>
-              <a:srgbClr val="D9A62E"/>
+              <a:srgbClr val="9A8248"/>
             </a:solidFill>
             <a:prstDash val="solid"/>
           </a:ln>
@@ -1448,7 +1448,7 @@
             <a:r>
               <a:rPr lang="en-US" sz="1350" b="1" dirty="0">
                 <a:solidFill>
-                  <a:srgbClr val="D9A62E"/>
+                  <a:srgbClr val="5A4420"/>
                 </a:solidFill>
                 <a:latin typeface="Calibri" pitchFamily="34" charset="0"/>
                 <a:ea typeface="Calibri" pitchFamily="34" charset="-122"/>
@@ -1484,17 +1484,6 @@
             <a:pPr indent="0" marL="0">
               <a:buNone/>
             </a:pPr>
-            <a:r>
-              <a:rPr lang="en-US" sz="1300" dirty="0">
-                <a:solidFill>
-                  <a:srgbClr val="6E6248"/>
-                </a:solidFill>
-                <a:latin typeface="Calibri" pitchFamily="34" charset="0"/>
-                <a:ea typeface="Calibri" pitchFamily="34" charset="-122"/>
-                <a:cs typeface="Calibri" pitchFamily="34" charset="-120"/>
-              </a:rPr>
-              <a:t>Fog &amp; Edge Computing (H9FECC)   ·   deployed live on AWS</a:t>
-            </a:r>
             <a:endParaRPr lang="en-US" sz="1300" dirty="0"/>
           </a:p>
         </p:txBody>
